--- a/bootcamp/Catalyst_Bootcamp_Facilitator_Guide.pptx
+++ b/bootcamp/Catalyst_Bootcamp_Facilitator_Guide.pptx
@@ -4,6 +4,9 @@
   <p:sldMasterIdLst>
     <p:sldMasterId id="2147483648" r:id="rId1"/>
   </p:sldMasterIdLst>
+  <p:notesMasterIdLst>
+    <p:notesMasterId r:id="rId13"/>
+  </p:notesMasterIdLst>
   <p:sldIdLst>
     <p:sldId id="256" r:id="rId2"/>
     <p:sldId id="257" r:id="rId3"/>
@@ -17,9 +20,6 @@
     <p:sldId id="265" r:id="rId11"/>
     <p:sldId id="266" r:id="rId12"/>
   </p:sldIdLst>
-  <p:notesMasterIdLst>
-    <p:notesMasterId r:id="rId13"/>
-  </p:notesMasterIdLst>
   <p:sldSz cx="12192000" cy="6858000"/>
   <p:notesSz cx="6858000" cy="12192000"/>
   <p:defaultTextStyle>
@@ -114,6 +114,11 @@
       </a:defRPr>
     </a:lvl9pPr>
   </p:defaultTextStyle>
+  <p:extLst>
+    <p:ext uri="{EFAFB233-063F-42B5-8137-9DF3F51BA10A}">
+      <p15:sldGuideLst xmlns:p15="http://schemas.microsoft.com/office/powerpoint/2012/main"/>
+    </p:ext>
+  </p:extLst>
 </p:presentation>
 </file>
 
@@ -139,234 +144,10 @@
           <a:chExt cx="0" cy="0"/>
         </a:xfrm>
       </p:grpSpPr>
-      <p:sp>
-        <p:nvSpPr>
-          <p:cNvPr id="2" name="Header Placeholder 1"/>
-          <p:cNvSpPr>
-            <a:spLocks noGrp="1"/>
-          </p:cNvSpPr>
-          <p:nvPr>
-            <p:ph type="hdr" sz="quarter"/>
-          </p:nvPr>
-        </p:nvSpPr>
-        <p:spPr>
-          <a:xfrm>
-            <a:off x="0" y="0"/>
-            <a:ext cx="2971800" cy="458788"/>
-          </a:xfrm>
-          <a:prstGeom prst="rect">
-            <a:avLst/>
-          </a:prstGeom>
-        </p:spPr>
-        <p:txBody>
-          <a:bodyPr vert="horz" lIns="91440" tIns="45720" rIns="91440" bIns="45720" rtlCol="0"/>
-          <a:lstStyle>
-            <a:lvl1pPr algn="l">
-              <a:defRPr sz="1200"/>
-            </a:lvl1pPr>
-          </a:lstStyle>
-          <a:p>
-            <a:endParaRPr lang="en-US"/>
-          </a:p>
-        </p:txBody>
-      </p:sp>
-      <p:sp>
-        <p:nvSpPr>
-          <p:cNvPr id="3" name="Date Placeholder 2"/>
-          <p:cNvSpPr>
-            <a:spLocks noGrp="1"/>
-          </p:cNvSpPr>
-          <p:nvPr>
-            <p:ph type="dt" idx="1"/>
-          </p:nvPr>
-        </p:nvSpPr>
-        <p:spPr>
-          <a:xfrm>
-            <a:off x="3884613" y="0"/>
-            <a:ext cx="2971800" cy="458788"/>
-          </a:xfrm>
-          <a:prstGeom prst="rect">
-            <a:avLst/>
-          </a:prstGeom>
-        </p:spPr>
-        <p:txBody>
-          <a:bodyPr vert="horz" lIns="91440" tIns="45720" rIns="91440" bIns="45720" rtlCol="0"/>
-          <a:lstStyle>
-            <a:lvl1pPr algn="r">
-              <a:defRPr sz="1200"/>
-            </a:lvl1pPr>
-          </a:lstStyle>
-          <a:p>
-            <a:fld id="{5282F153-3F37-0F45-9E97-73ACFA13230C}" type="datetimeFigureOut">
-              <a:rPr lang="en-US"/>
-              <a:t>7/23/19</a:t>
-            </a:fld>
-            <a:endParaRPr lang="en-US"/>
-          </a:p>
-        </p:txBody>
-      </p:sp>
-      <p:sp>
-        <p:nvSpPr>
-          <p:cNvPr id="4" name="Slide Image Placeholder 3"/>
-          <p:cNvSpPr>
-            <a:spLocks noGrp="1" noRot="1" noChangeAspect="1"/>
-          </p:cNvSpPr>
-          <p:nvPr>
-            <p:ph type="sldImg" idx="2"/>
-          </p:nvPr>
-        </p:nvSpPr>
-        <p:spPr>
-          <a:xfrm>
-            <a:off x="685800" y="1143000"/>
-            <a:ext cx="5486400" cy="3086100"/>
-          </a:xfrm>
-          <a:prstGeom prst="rect">
-            <a:avLst/>
-          </a:prstGeom>
-          <a:noFill/>
-          <a:ln w="12700">
-            <a:solidFill>
-              <a:prstClr val="black"/>
-            </a:solidFill>
-          </a:ln>
-        </p:spPr>
-        <p:txBody>
-          <a:bodyPr vert="horz" lIns="91440" tIns="45720" rIns="91440" bIns="45720" rtlCol="0" anchor="ctr"/>
-          <a:lstStyle/>
-          <a:p>
-            <a:endParaRPr lang="en-US"/>
-          </a:p>
-        </p:txBody>
-      </p:sp>
-      <p:sp>
-        <p:nvSpPr>
-          <p:cNvPr id="5" name="Notes Placeholder 4"/>
-          <p:cNvSpPr>
-            <a:spLocks noGrp="1"/>
-          </p:cNvSpPr>
-          <p:nvPr>
-            <p:ph type="body" sz="quarter" idx="3"/>
-          </p:nvPr>
-        </p:nvSpPr>
-        <p:spPr>
-          <a:xfrm>
-            <a:off x="685800" y="4400550"/>
-            <a:ext cx="5486400" cy="3600450"/>
-          </a:xfrm>
-          <a:prstGeom prst="rect">
-            <a:avLst/>
-          </a:prstGeom>
-        </p:spPr>
-        <p:txBody>
-          <a:bodyPr vert="horz" lIns="91440" tIns="45720" rIns="91440" bIns="45720" rtlCol="0"/>
-          <a:lstStyle/>
-          <a:p>
-            <a:pPr lvl="0"/>
-            <a:r>
-              <a:rPr lang="en-US"/>
-              <a:t>Click to edit Master text styles</a:t>
-            </a:r>
-          </a:p>
-          <a:p>
-            <a:pPr lvl="1"/>
-            <a:r>
-              <a:rPr lang="en-US"/>
-              <a:t>Second level</a:t>
-            </a:r>
-          </a:p>
-          <a:p>
-            <a:pPr lvl="2"/>
-            <a:r>
-              <a:rPr lang="en-US"/>
-              <a:t>Third level</a:t>
-            </a:r>
-          </a:p>
-          <a:p>
-            <a:pPr lvl="3"/>
-            <a:r>
-              <a:rPr lang="en-US"/>
-              <a:t>Fourth level</a:t>
-            </a:r>
-          </a:p>
-          <a:p>
-            <a:pPr lvl="4"/>
-            <a:r>
-              <a:rPr lang="en-US"/>
-              <a:t>Fifth level</a:t>
-            </a:r>
-          </a:p>
-        </p:txBody>
-      </p:sp>
-      <p:sp>
-        <p:nvSpPr>
-          <p:cNvPr id="6" name="Footer Placeholder 5"/>
-          <p:cNvSpPr>
-            <a:spLocks noGrp="1"/>
-          </p:cNvSpPr>
-          <p:nvPr>
-            <p:ph type="ftr" sz="quarter" idx="4"/>
-          </p:nvPr>
-        </p:nvSpPr>
-        <p:spPr>
-          <a:xfrm>
-            <a:off x="0" y="8685213"/>
-            <a:ext cx="2971800" cy="458787"/>
-          </a:xfrm>
-          <a:prstGeom prst="rect">
-            <a:avLst/>
-          </a:prstGeom>
-        </p:spPr>
-        <p:txBody>
-          <a:bodyPr vert="horz" lIns="91440" tIns="45720" rIns="91440" bIns="45720" rtlCol="0" anchor="b"/>
-          <a:lstStyle>
-            <a:lvl1pPr algn="l">
-              <a:defRPr sz="1200"/>
-            </a:lvl1pPr>
-          </a:lstStyle>
-          <a:p>
-            <a:endParaRPr lang="en-US"/>
-          </a:p>
-        </p:txBody>
-      </p:sp>
-      <p:sp>
-        <p:nvSpPr>
-          <p:cNvPr id="7" name="Slide Number Placeholder 6"/>
-          <p:cNvSpPr>
-            <a:spLocks noGrp="1"/>
-          </p:cNvSpPr>
-          <p:nvPr>
-            <p:ph type="sldNum" sz="quarter" idx="5"/>
-          </p:nvPr>
-        </p:nvSpPr>
-        <p:spPr>
-          <a:xfrm>
-            <a:off x="3884613" y="8685213"/>
-            <a:ext cx="2971800" cy="458787"/>
-          </a:xfrm>
-          <a:prstGeom prst="rect">
-            <a:avLst/>
-          </a:prstGeom>
-        </p:spPr>
-        <p:txBody>
-          <a:bodyPr vert="horz" lIns="91440" tIns="45720" rIns="91440" bIns="45720" rtlCol="0" anchor="b"/>
-          <a:lstStyle>
-            <a:lvl1pPr algn="r">
-              <a:defRPr sz="1200"/>
-            </a:lvl1pPr>
-          </a:lstStyle>
-          <a:p>
-            <a:fld id="{CE5E9CC1-C706-0F49-92D6-E571CC5EEA8F}" type="slidenum">
-              <a:rPr lang="en-US"/>
-              <a:t>‹#›</a:t>
-            </a:fld>
-            <a:endParaRPr lang="en-US"/>
-          </a:p>
-        </p:txBody>
-      </p:sp>
     </p:spTree>
     <p:extLst>
       <p:ext uri="{BB962C8B-B14F-4D97-AF65-F5344CB8AC3E}">
-        <p14:creationId xmlns:p14="http://schemas.microsoft.com/office/powerpoint/2010/main" val="1024086991"/>
+        <p14:creationId xmlns:p14="http://schemas.microsoft.com/office/powerpoint/2010/main" val="2711117946"/>
       </p:ext>
     </p:extLst>
   </p:cSld>
@@ -510,10 +291,6 @@
           <a:bodyPr/>
           <a:lstStyle/>
           <a:p>
-            <a:r>
-              <a:rPr lang="en-US" dirty="0"/>
-              <a:t/>
-            </a:r>
             <a:endParaRPr lang="en-US" dirty="0"/>
           </a:p>
         </p:txBody>
@@ -598,10 +375,6 @@
           <a:bodyPr/>
           <a:lstStyle/>
           <a:p>
-            <a:r>
-              <a:rPr lang="en-US" dirty="0"/>
-              <a:t/>
-            </a:r>
             <a:endParaRPr lang="en-US" dirty="0"/>
           </a:p>
         </p:txBody>
@@ -686,10 +459,6 @@
           <a:bodyPr/>
           <a:lstStyle/>
           <a:p>
-            <a:r>
-              <a:rPr lang="en-US" dirty="0"/>
-              <a:t/>
-            </a:r>
             <a:endParaRPr lang="en-US" dirty="0"/>
           </a:p>
         </p:txBody>
@@ -774,10 +543,6 @@
           <a:bodyPr/>
           <a:lstStyle/>
           <a:p>
-            <a:r>
-              <a:rPr lang="en-US" dirty="0"/>
-              <a:t/>
-            </a:r>
             <a:endParaRPr lang="en-US" dirty="0"/>
           </a:p>
         </p:txBody>
@@ -862,10 +627,6 @@
           <a:bodyPr/>
           <a:lstStyle/>
           <a:p>
-            <a:r>
-              <a:rPr lang="en-US" dirty="0"/>
-              <a:t/>
-            </a:r>
             <a:endParaRPr lang="en-US" dirty="0"/>
           </a:p>
         </p:txBody>
@@ -950,10 +711,6 @@
           <a:bodyPr/>
           <a:lstStyle/>
           <a:p>
-            <a:r>
-              <a:rPr lang="en-US" dirty="0"/>
-              <a:t/>
-            </a:r>
             <a:endParaRPr lang="en-US" dirty="0"/>
           </a:p>
         </p:txBody>
@@ -1038,10 +795,6 @@
           <a:bodyPr/>
           <a:lstStyle/>
           <a:p>
-            <a:r>
-              <a:rPr lang="en-US" dirty="0"/>
-              <a:t/>
-            </a:r>
             <a:endParaRPr lang="en-US" dirty="0"/>
           </a:p>
         </p:txBody>
@@ -1126,10 +879,6 @@
           <a:bodyPr/>
           <a:lstStyle/>
           <a:p>
-            <a:r>
-              <a:rPr lang="en-US" dirty="0"/>
-              <a:t/>
-            </a:r>
             <a:endParaRPr lang="en-US" dirty="0"/>
           </a:p>
         </p:txBody>
@@ -1214,10 +963,6 @@
           <a:bodyPr/>
           <a:lstStyle/>
           <a:p>
-            <a:r>
-              <a:rPr lang="en-US" dirty="0"/>
-              <a:t/>
-            </a:r>
             <a:endParaRPr lang="en-US" dirty="0"/>
           </a:p>
         </p:txBody>
@@ -1302,10 +1047,6 @@
           <a:bodyPr/>
           <a:lstStyle/>
           <a:p>
-            <a:r>
-              <a:rPr lang="en-US" dirty="0"/>
-              <a:t/>
-            </a:r>
             <a:endParaRPr lang="en-US" dirty="0"/>
           </a:p>
         </p:txBody>
@@ -1390,10 +1131,6 @@
           <a:bodyPr/>
           <a:lstStyle/>
           <a:p>
-            <a:r>
-              <a:rPr lang="en-US" dirty="0"/>
-              <a:t/>
-            </a:r>
             <a:endParaRPr lang="en-US" dirty="0"/>
           </a:p>
         </p:txBody>
@@ -1467,6 +1204,11 @@
 <file path=ppt/slideMasters/slideMaster1.xml><?xml version="1.0" encoding="utf-8"?>
 <p:sldMaster xmlns:a="http://schemas.openxmlformats.org/drawingml/2006/main" xmlns:r="http://schemas.openxmlformats.org/officeDocument/2006/relationships" xmlns:p="http://schemas.openxmlformats.org/presentationml/2006/main">
   <p:cSld>
+    <p:bg>
+      <p:bgRef idx="1001">
+        <a:schemeClr val="bg1"/>
+      </p:bgRef>
+    </p:bg>
     <p:spTree>
       <p:nvGrpSpPr>
         <p:cNvPr id="1" name=""/>
@@ -1777,6 +1519,13 @@
           </a:solidFill>
           <a:ln/>
         </p:spPr>
+        <p:txBody>
+          <a:bodyPr/>
+          <a:lstStyle/>
+          <a:p>
+            <a:endParaRPr lang="en-US"/>
+          </a:p>
+        </p:txBody>
       </p:sp>
       <p:sp>
         <p:nvSpPr>
@@ -1799,7 +1548,7 @@
           <a:bodyPr wrap="square" rtlCol="0" anchor="ctr"/>
           <a:lstStyle/>
           <a:p>
-            <a:pPr indent="0" marL="0">
+            <a:pPr marL="0" indent="0">
               <a:buNone/>
             </a:pPr>
             <a:r>
@@ -1838,7 +1587,7 @@
           <a:bodyPr wrap="square" rtlCol="0" anchor="ctr"/>
           <a:lstStyle/>
           <a:p>
-            <a:pPr indent="0" marL="0">
+            <a:pPr marL="0" indent="0">
               <a:buNone/>
             </a:pPr>
             <a:r>
@@ -1877,7 +1626,7 @@
           <a:bodyPr wrap="square" rtlCol="0" anchor="ctr"/>
           <a:lstStyle/>
           <a:p>
-            <a:pPr indent="0" marL="0">
+            <a:pPr marL="0" indent="0">
               <a:buNone/>
             </a:pPr>
             <a:r>
@@ -1914,6 +1663,13 @@
           </a:solidFill>
           <a:ln/>
         </p:spPr>
+        <p:txBody>
+          <a:bodyPr/>
+          <a:lstStyle/>
+          <a:p>
+            <a:endParaRPr lang="en-US"/>
+          </a:p>
+        </p:txBody>
       </p:sp>
       <p:sp>
         <p:nvSpPr>
@@ -1936,7 +1692,7 @@
           <a:bodyPr wrap="square" rtlCol="0" anchor="ctr"/>
           <a:lstStyle/>
           <a:p>
-            <a:pPr indent="0" marL="0">
+            <a:pPr marL="0" indent="0">
               <a:lnSpc>
                 <a:spcPts val="2000"/>
               </a:lnSpc>
@@ -1956,7 +1712,7 @@
             <a:endParaRPr lang="en-US" sz="1200" dirty="0"/>
           </a:p>
           <a:p>
-            <a:pPr indent="0" marL="0">
+            <a:pPr marL="0" indent="0">
               <a:lnSpc>
                 <a:spcPts val="2000"/>
               </a:lnSpc>
@@ -1976,7 +1732,7 @@
             <a:endParaRPr lang="en-US" sz="1200" dirty="0"/>
           </a:p>
           <a:p>
-            <a:pPr indent="0" marL="0">
+            <a:pPr marL="0" indent="0">
               <a:lnSpc>
                 <a:spcPts val="2000"/>
               </a:lnSpc>
@@ -1985,7 +1741,7 @@
             <a:endParaRPr lang="en-US" sz="1200" dirty="0"/>
           </a:p>
           <a:p>
-            <a:pPr indent="0" marL="0">
+            <a:pPr marL="0" indent="0">
               <a:lnSpc>
                 <a:spcPts val="2000"/>
               </a:lnSpc>
@@ -2005,7 +1761,7 @@
             <a:endParaRPr lang="en-US" sz="1200" dirty="0"/>
           </a:p>
           <a:p>
-            <a:pPr indent="0" marL="0">
+            <a:pPr marL="0" indent="0">
               <a:lnSpc>
                 <a:spcPts val="2000"/>
               </a:lnSpc>
@@ -2025,7 +1781,7 @@
             <a:endParaRPr lang="en-US" sz="1200" dirty="0"/>
           </a:p>
           <a:p>
-            <a:pPr indent="0" marL="0">
+            <a:pPr marL="0" indent="0">
               <a:lnSpc>
                 <a:spcPts val="2000"/>
               </a:lnSpc>
@@ -2045,7 +1801,7 @@
             <a:endParaRPr lang="en-US" sz="1200" dirty="0"/>
           </a:p>
           <a:p>
-            <a:pPr indent="0" marL="0">
+            <a:pPr marL="0" indent="0">
               <a:lnSpc>
                 <a:spcPts val="2000"/>
               </a:lnSpc>
@@ -2065,7 +1821,7 @@
             <a:endParaRPr lang="en-US" sz="1200" dirty="0"/>
           </a:p>
           <a:p>
-            <a:pPr indent="0" marL="0">
+            <a:pPr marL="0" indent="0">
               <a:lnSpc>
                 <a:spcPts val="2000"/>
               </a:lnSpc>
@@ -2074,7 +1830,7 @@
             <a:endParaRPr lang="en-US" sz="1200" dirty="0"/>
           </a:p>
           <a:p>
-            <a:pPr indent="0" marL="0">
+            <a:pPr marL="0" indent="0">
               <a:lnSpc>
                 <a:spcPts val="2000"/>
               </a:lnSpc>
@@ -2089,12 +1845,12 @@
                 <a:ea typeface="Segoe UI" pitchFamily="34" charset="-122"/>
                 <a:cs typeface="Segoe UI" pitchFamily="34" charset="-120"/>
               </a:rPr>
-              <a:t>Prepared by Performance Analytics</a:t>
+              <a:t>Prepared by Joshua Edgecomb</a:t>
             </a:r>
             <a:endParaRPr lang="en-US" sz="1200" dirty="0"/>
           </a:p>
           <a:p>
-            <a:pPr indent="0" marL="0">
+            <a:pPr marL="0" indent="0">
               <a:lnSpc>
                 <a:spcPts val="2000"/>
               </a:lnSpc>
@@ -2159,6 +1915,13 @@
           </a:solidFill>
           <a:ln/>
         </p:spPr>
+        <p:txBody>
+          <a:bodyPr/>
+          <a:lstStyle/>
+          <a:p>
+            <a:endParaRPr lang="en-US"/>
+          </a:p>
+        </p:txBody>
       </p:sp>
       <p:sp>
         <p:nvSpPr>
@@ -2181,7 +1944,7 @@
           <a:bodyPr wrap="square" rtlCol="0" anchor="ctr"/>
           <a:lstStyle/>
           <a:p>
-            <a:pPr indent="0" marL="0">
+            <a:pPr marL="0" indent="0">
               <a:buNone/>
             </a:pPr>
             <a:r>
@@ -2220,7 +1983,7 @@
           <a:bodyPr wrap="square" rtlCol="0" anchor="ctr"/>
           <a:lstStyle/>
           <a:p>
-            <a:pPr indent="0" marL="0">
+            <a:pPr marL="0" indent="0">
               <a:buNone/>
             </a:pPr>
             <a:r>
@@ -2261,6 +2024,13 @@
           </a:solidFill>
           <a:ln/>
         </p:spPr>
+        <p:txBody>
+          <a:bodyPr/>
+          <a:lstStyle/>
+          <a:p>
+            <a:endParaRPr lang="en-US"/>
+          </a:p>
+        </p:txBody>
       </p:sp>
       <p:sp>
         <p:nvSpPr>
@@ -2283,7 +2053,7 @@
           <a:bodyPr wrap="square" rtlCol="0" anchor="ctr"/>
           <a:lstStyle/>
           <a:p>
-            <a:pPr algn="ctr" indent="0" marL="0">
+            <a:pPr marL="0" indent="0" algn="ctr">
               <a:buNone/>
             </a:pPr>
             <a:r>
@@ -2322,7 +2092,7 @@
           <a:bodyPr wrap="square" rtlCol="0" anchor="ctr"/>
           <a:lstStyle/>
           <a:p>
-            <a:pPr algn="ctr" indent="0" marL="0">
+            <a:pPr marL="0" indent="0" algn="ctr">
               <a:buNone/>
             </a:pPr>
             <a:r>
@@ -2361,6 +2131,13 @@
           </a:solidFill>
           <a:ln/>
         </p:spPr>
+        <p:txBody>
+          <a:bodyPr/>
+          <a:lstStyle/>
+          <a:p>
+            <a:endParaRPr lang="en-US"/>
+          </a:p>
+        </p:txBody>
       </p:sp>
       <p:sp>
         <p:nvSpPr>
@@ -2383,7 +2160,7 @@
           <a:bodyPr wrap="square" rtlCol="0" anchor="ctr"/>
           <a:lstStyle/>
           <a:p>
-            <a:pPr algn="ctr" indent="0" marL="0">
+            <a:pPr marL="0" indent="0" algn="ctr">
               <a:buNone/>
             </a:pPr>
             <a:r>
@@ -2422,7 +2199,7 @@
           <a:bodyPr wrap="square" rtlCol="0" anchor="ctr"/>
           <a:lstStyle/>
           <a:p>
-            <a:pPr indent="0" marL="0">
+            <a:pPr marL="0" indent="0">
               <a:buNone/>
             </a:pPr>
             <a:r>
@@ -2461,7 +2238,7 @@
           <a:bodyPr wrap="square" rtlCol="0" anchor="t"/>
           <a:lstStyle/>
           <a:p>
-            <a:pPr indent="0" marL="0">
+            <a:pPr marL="0" indent="0">
               <a:lnSpc>
                 <a:spcPts val="1600"/>
               </a:lnSpc>
@@ -2503,6 +2280,13 @@
           </a:solidFill>
           <a:ln/>
         </p:spPr>
+        <p:txBody>
+          <a:bodyPr/>
+          <a:lstStyle/>
+          <a:p>
+            <a:endParaRPr lang="en-US"/>
+          </a:p>
+        </p:txBody>
       </p:sp>
       <p:sp>
         <p:nvSpPr>
@@ -2525,7 +2309,7 @@
           <a:bodyPr wrap="square" rtlCol="0" anchor="ctr"/>
           <a:lstStyle/>
           <a:p>
-            <a:pPr algn="ctr" indent="0" marL="0">
+            <a:pPr marL="0" indent="0" algn="ctr">
               <a:buNone/>
             </a:pPr>
             <a:r>
@@ -2564,7 +2348,7 @@
           <a:bodyPr wrap="square" rtlCol="0" anchor="ctr"/>
           <a:lstStyle/>
           <a:p>
-            <a:pPr indent="0" marL="0">
+            <a:pPr marL="0" indent="0">
               <a:buNone/>
             </a:pPr>
             <a:r>
@@ -2603,7 +2387,7 @@
           <a:bodyPr wrap="square" rtlCol="0" anchor="t"/>
           <a:lstStyle/>
           <a:p>
-            <a:pPr indent="0" marL="0">
+            <a:pPr marL="0" indent="0">
               <a:lnSpc>
                 <a:spcPts val="1600"/>
               </a:lnSpc>
@@ -2645,6 +2429,13 @@
           </a:solidFill>
           <a:ln/>
         </p:spPr>
+        <p:txBody>
+          <a:bodyPr/>
+          <a:lstStyle/>
+          <a:p>
+            <a:endParaRPr lang="en-US"/>
+          </a:p>
+        </p:txBody>
       </p:sp>
       <p:sp>
         <p:nvSpPr>
@@ -2667,7 +2458,7 @@
           <a:bodyPr wrap="square" rtlCol="0" anchor="ctr"/>
           <a:lstStyle/>
           <a:p>
-            <a:pPr algn="ctr" indent="0" marL="0">
+            <a:pPr marL="0" indent="0" algn="ctr">
               <a:buNone/>
             </a:pPr>
             <a:r>
@@ -2706,7 +2497,7 @@
           <a:bodyPr wrap="square" rtlCol="0" anchor="ctr"/>
           <a:lstStyle/>
           <a:p>
-            <a:pPr indent="0" marL="0">
+            <a:pPr marL="0" indent="0">
               <a:buNone/>
             </a:pPr>
             <a:r>
@@ -2745,7 +2536,7 @@
           <a:bodyPr wrap="square" rtlCol="0" anchor="t"/>
           <a:lstStyle/>
           <a:p>
-            <a:pPr indent="0" marL="0">
+            <a:pPr marL="0" indent="0">
               <a:lnSpc>
                 <a:spcPts val="1600"/>
               </a:lnSpc>
@@ -2787,6 +2578,13 @@
           </a:solidFill>
           <a:ln/>
         </p:spPr>
+        <p:txBody>
+          <a:bodyPr/>
+          <a:lstStyle/>
+          <a:p>
+            <a:endParaRPr lang="en-US"/>
+          </a:p>
+        </p:txBody>
       </p:sp>
       <p:sp>
         <p:nvSpPr>
@@ -2809,7 +2607,7 @@
           <a:bodyPr wrap="square" rtlCol="0" anchor="ctr"/>
           <a:lstStyle/>
           <a:p>
-            <a:pPr algn="ctr" indent="0" marL="0">
+            <a:pPr marL="0" indent="0" algn="ctr">
               <a:buNone/>
             </a:pPr>
             <a:r>
@@ -2848,7 +2646,7 @@
           <a:bodyPr wrap="square" rtlCol="0" anchor="ctr"/>
           <a:lstStyle/>
           <a:p>
-            <a:pPr indent="0" marL="0">
+            <a:pPr marL="0" indent="0">
               <a:buNone/>
             </a:pPr>
             <a:r>
@@ -2887,7 +2685,7 @@
           <a:bodyPr wrap="square" rtlCol="0" anchor="t"/>
           <a:lstStyle/>
           <a:p>
-            <a:pPr indent="0" marL="0">
+            <a:pPr marL="0" indent="0">
               <a:lnSpc>
                 <a:spcPts val="1600"/>
               </a:lnSpc>
@@ -2929,6 +2727,13 @@
           </a:solidFill>
           <a:ln/>
         </p:spPr>
+        <p:txBody>
+          <a:bodyPr/>
+          <a:lstStyle/>
+          <a:p>
+            <a:endParaRPr lang="en-US"/>
+          </a:p>
+        </p:txBody>
       </p:sp>
       <p:sp>
         <p:nvSpPr>
@@ -2951,7 +2756,7 @@
           <a:bodyPr wrap="square" rtlCol="0" anchor="ctr"/>
           <a:lstStyle/>
           <a:p>
-            <a:pPr algn="ctr" indent="0" marL="0">
+            <a:pPr marL="0" indent="0" algn="ctr">
               <a:buNone/>
             </a:pPr>
             <a:r>
@@ -2990,7 +2795,7 @@
           <a:bodyPr wrap="square" rtlCol="0" anchor="ctr"/>
           <a:lstStyle/>
           <a:p>
-            <a:pPr indent="0" marL="0">
+            <a:pPr marL="0" indent="0">
               <a:buNone/>
             </a:pPr>
             <a:r>
@@ -3029,7 +2834,7 @@
           <a:bodyPr wrap="square" rtlCol="0" anchor="t"/>
           <a:lstStyle/>
           <a:p>
-            <a:pPr indent="0" marL="0">
+            <a:pPr marL="0" indent="0">
               <a:lnSpc>
                 <a:spcPts val="1600"/>
               </a:lnSpc>
@@ -3076,6 +2881,13 @@
             <a:prstDash val="solid"/>
           </a:ln>
         </p:spPr>
+        <p:txBody>
+          <a:bodyPr/>
+          <a:lstStyle/>
+          <a:p>
+            <a:endParaRPr lang="en-US"/>
+          </a:p>
+        </p:txBody>
       </p:sp>
       <p:sp>
         <p:nvSpPr>
@@ -3098,7 +2910,7 @@
           <a:bodyPr wrap="square" rtlCol="0" anchor="ctr"/>
           <a:lstStyle/>
           <a:p>
-            <a:pPr algn="ctr" indent="0" marL="0">
+            <a:pPr marL="0" indent="0" algn="ctr">
               <a:buNone/>
             </a:pPr>
             <a:r>
@@ -3142,6 +2954,13 @@
             <a:prstDash val="solid"/>
           </a:ln>
         </p:spPr>
+        <p:txBody>
+          <a:bodyPr/>
+          <a:lstStyle/>
+          <a:p>
+            <a:endParaRPr lang="en-US"/>
+          </a:p>
+        </p:txBody>
       </p:sp>
       <p:sp>
         <p:nvSpPr>
@@ -3164,7 +2983,7 @@
           <a:bodyPr wrap="square" rtlCol="0" anchor="ctr"/>
           <a:lstStyle/>
           <a:p>
-            <a:pPr algn="ctr" indent="0" marL="0">
+            <a:pPr marL="0" indent="0" algn="ctr">
               <a:buNone/>
             </a:pPr>
             <a:r>
@@ -3208,6 +3027,13 @@
             <a:prstDash val="solid"/>
           </a:ln>
         </p:spPr>
+        <p:txBody>
+          <a:bodyPr/>
+          <a:lstStyle/>
+          <a:p>
+            <a:endParaRPr lang="en-US"/>
+          </a:p>
+        </p:txBody>
       </p:sp>
       <p:sp>
         <p:nvSpPr>
@@ -3230,7 +3056,7 @@
           <a:bodyPr wrap="square" rtlCol="0" anchor="ctr"/>
           <a:lstStyle/>
           <a:p>
-            <a:pPr algn="ctr" indent="0" marL="0">
+            <a:pPr marL="0" indent="0" algn="ctr">
               <a:buNone/>
             </a:pPr>
             <a:r>
@@ -3274,6 +3100,13 @@
             <a:prstDash val="solid"/>
           </a:ln>
         </p:spPr>
+        <p:txBody>
+          <a:bodyPr/>
+          <a:lstStyle/>
+          <a:p>
+            <a:endParaRPr lang="en-US"/>
+          </a:p>
+        </p:txBody>
       </p:sp>
       <p:sp>
         <p:nvSpPr>
@@ -3296,7 +3129,7 @@
           <a:bodyPr wrap="square" rtlCol="0" anchor="ctr"/>
           <a:lstStyle/>
           <a:p>
-            <a:pPr algn="ctr" indent="0" marL="0">
+            <a:pPr marL="0" indent="0" algn="ctr">
               <a:buNone/>
             </a:pPr>
             <a:r>
@@ -3340,6 +3173,13 @@
             <a:prstDash val="solid"/>
           </a:ln>
         </p:spPr>
+        <p:txBody>
+          <a:bodyPr/>
+          <a:lstStyle/>
+          <a:p>
+            <a:endParaRPr lang="en-US"/>
+          </a:p>
+        </p:txBody>
       </p:sp>
       <p:sp>
         <p:nvSpPr>
@@ -3362,7 +3202,7 @@
           <a:bodyPr wrap="square" rtlCol="0" anchor="ctr"/>
           <a:lstStyle/>
           <a:p>
-            <a:pPr algn="ctr" indent="0" marL="0">
+            <a:pPr marL="0" indent="0" algn="ctr">
               <a:buNone/>
             </a:pPr>
             <a:r>
@@ -3401,7 +3241,7 @@
           <a:bodyPr wrap="square" rtlCol="0" anchor="ctr"/>
           <a:lstStyle/>
           <a:p>
-            <a:pPr algn="ctr" indent="0" marL="0">
+            <a:pPr marL="0" indent="0" algn="ctr">
               <a:buNone/>
             </a:pPr>
             <a:r>
@@ -3463,6 +3303,13 @@
           </a:solidFill>
           <a:ln/>
         </p:spPr>
+        <p:txBody>
+          <a:bodyPr/>
+          <a:lstStyle/>
+          <a:p>
+            <a:endParaRPr lang="en-US"/>
+          </a:p>
+        </p:txBody>
       </p:sp>
       <p:sp>
         <p:nvSpPr>
@@ -3485,7 +3332,7 @@
           <a:bodyPr wrap="square" rtlCol="0" anchor="ctr"/>
           <a:lstStyle/>
           <a:p>
-            <a:pPr indent="0" marL="0">
+            <a:pPr marL="0" indent="0">
               <a:buNone/>
             </a:pPr>
             <a:r>
@@ -3524,7 +3371,7 @@
           <a:bodyPr wrap="square" rtlCol="0" anchor="ctr"/>
           <a:lstStyle/>
           <a:p>
-            <a:pPr indent="0" marL="0">
+            <a:pPr marL="0" indent="0">
               <a:buNone/>
             </a:pPr>
             <a:r>
@@ -3565,6 +3412,13 @@
           </a:solidFill>
           <a:ln/>
         </p:spPr>
+        <p:txBody>
+          <a:bodyPr/>
+          <a:lstStyle/>
+          <a:p>
+            <a:endParaRPr lang="en-US"/>
+          </a:p>
+        </p:txBody>
       </p:sp>
       <p:sp>
         <p:nvSpPr>
@@ -3587,7 +3441,7 @@
           <a:bodyPr wrap="square" rtlCol="0" anchor="ctr"/>
           <a:lstStyle/>
           <a:p>
-            <a:pPr algn="ctr" indent="0" marL="0">
+            <a:pPr marL="0" indent="0" algn="ctr">
               <a:buNone/>
             </a:pPr>
             <a:r>
@@ -3626,7 +3480,7 @@
           <a:bodyPr wrap="square" rtlCol="0" anchor="ctr"/>
           <a:lstStyle/>
           <a:p>
-            <a:pPr algn="ctr" indent="0" marL="0">
+            <a:pPr marL="0" indent="0" algn="ctr">
               <a:buNone/>
             </a:pPr>
             <a:r>
@@ -3665,6 +3519,13 @@
           </a:solidFill>
           <a:ln/>
         </p:spPr>
+        <p:txBody>
+          <a:bodyPr/>
+          <a:lstStyle/>
+          <a:p>
+            <a:endParaRPr lang="en-US"/>
+          </a:p>
+        </p:txBody>
       </p:sp>
       <p:sp>
         <p:nvSpPr>
@@ -3687,7 +3548,7 @@
           <a:bodyPr wrap="square" rtlCol="0" anchor="ctr"/>
           <a:lstStyle/>
           <a:p>
-            <a:pPr indent="0" marL="0">
+            <a:pPr marL="0" indent="0">
               <a:buNone/>
             </a:pPr>
             <a:r>
@@ -3726,7 +3587,7 @@
           <a:bodyPr wrap="square" rtlCol="0" anchor="ctr"/>
           <a:lstStyle/>
           <a:p>
-            <a:pPr indent="0" marL="0">
+            <a:pPr marL="0" indent="0">
               <a:lnSpc>
                 <a:spcPts val="2000"/>
               </a:lnSpc>
@@ -3743,12 +3604,6 @@
               </a:rPr>
               <a:t>Setup: </a:t>
             </a:r>
-            <a:pPr indent="0" marL="0">
-              <a:lnSpc>
-                <a:spcPts val="2000"/>
-              </a:lnSpc>
-              <a:buNone/>
-            </a:pPr>
             <a:r>
               <a:rPr lang="en-US" sz="1050" dirty="0">
                 <a:solidFill>
@@ -3761,12 +3616,6 @@
               <a:t>Prepare 3-4 detailed customer personas. Agent volunteers for hot seat. Facilitator plays the customer.
 </a:t>
             </a:r>
-            <a:pPr indent="0" marL="0">
-              <a:lnSpc>
-                <a:spcPts val="2000"/>
-              </a:lnSpc>
-              <a:buNone/>
-            </a:pPr>
             <a:r>
               <a:rPr lang="en-US" sz="1050" b="1" dirty="0">
                 <a:solidFill>
@@ -3778,12 +3627,6 @@
               </a:rPr>
               <a:t>Full flow: </a:t>
             </a:r>
-            <a:pPr indent="0" marL="0">
-              <a:lnSpc>
-                <a:spcPts val="2000"/>
-              </a:lnSpc>
-              <a:buNone/>
-            </a:pPr>
             <a:r>
               <a:rPr lang="en-US" sz="1050" dirty="0">
                 <a:solidFill>
@@ -3796,12 +3639,6 @@
               <a:t>Opening, Discovery, Pitch with tie-backs, Handle objection, Re-close, Summarize. Group scores each phase.
 </a:t>
             </a:r>
-            <a:pPr indent="0" marL="0">
-              <a:lnSpc>
-                <a:spcPts val="2000"/>
-              </a:lnSpc>
-              <a:buNone/>
-            </a:pPr>
             <a:r>
               <a:rPr lang="en-US" sz="1050" b="1" dirty="0">
                 <a:solidFill>
@@ -3813,12 +3650,6 @@
               </a:rPr>
               <a:t>Debrief: </a:t>
             </a:r>
-            <a:pPr indent="0" marL="0">
-              <a:lnSpc>
-                <a:spcPts val="2000"/>
-              </a:lnSpc>
-              <a:buNone/>
-            </a:pPr>
             <a:r>
               <a:rPr lang="en-US" sz="1050" dirty="0">
                 <a:solidFill>
@@ -3855,6 +3686,13 @@
           </a:solidFill>
           <a:ln/>
         </p:spPr>
+        <p:txBody>
+          <a:bodyPr/>
+          <a:lstStyle/>
+          <a:p>
+            <a:endParaRPr lang="en-US"/>
+          </a:p>
+        </p:txBody>
       </p:sp>
       <p:sp>
         <p:nvSpPr>
@@ -3877,7 +3715,7 @@
           <a:bodyPr wrap="square" rtlCol="0" anchor="ctr"/>
           <a:lstStyle/>
           <a:p>
-            <a:pPr indent="0" marL="0">
+            <a:pPr marL="0" indent="0">
               <a:buNone/>
             </a:pPr>
             <a:r>
@@ -3916,7 +3754,7 @@
           <a:bodyPr wrap="square" rtlCol="0" anchor="ctr"/>
           <a:lstStyle/>
           <a:p>
-            <a:pPr indent="0" marL="0">
+            <a:pPr marL="0" indent="0">
               <a:lnSpc>
                 <a:spcPts val="1800"/>
               </a:lnSpc>
@@ -3934,12 +3772,6 @@
               <a:t>Day 1 - Opening
 </a:t>
             </a:r>
-            <a:pPr indent="0" marL="0">
-              <a:lnSpc>
-                <a:spcPts val="1800"/>
-              </a:lnSpc>
-              <a:buNone/>
-            </a:pPr>
             <a:r>
               <a:rPr lang="en-US" sz="1000" dirty="0">
                 <a:solidFill>
@@ -3952,12 +3784,6 @@
               <a:t>  Smile before you dial. Name in first 15s. Pause after "How are you?" Disclosure delivered naturally.
 </a:t>
             </a:r>
-            <a:pPr indent="0" marL="0">
-              <a:lnSpc>
-                <a:spcPts val="1800"/>
-              </a:lnSpc>
-              <a:buNone/>
-            </a:pPr>
             <a:r>
               <a:rPr lang="en-US" sz="1050" b="1" dirty="0">
                 <a:solidFill>
@@ -3970,12 +3796,6 @@
               <a:t>Day 2 - Discovery
 </a:t>
             </a:r>
-            <a:pPr indent="0" marL="0">
-              <a:lnSpc>
-                <a:spcPts val="1800"/>
-              </a:lnSpc>
-              <a:buNone/>
-            </a:pPr>
             <a:r>
               <a:rPr lang="en-US" sz="1000" dirty="0">
                 <a:solidFill>
@@ -3988,12 +3808,6 @@
               <a:t>  Open-ended questions. 4 pillars. Record tie-backs. Conversation, not interrogation.
 </a:t>
             </a:r>
-            <a:pPr indent="0" marL="0">
-              <a:lnSpc>
-                <a:spcPts val="1800"/>
-              </a:lnSpc>
-              <a:buNone/>
-            </a:pPr>
             <a:r>
               <a:rPr lang="en-US" sz="1050" b="1" dirty="0">
                 <a:solidFill>
@@ -4006,12 +3820,6 @@
               <a:t>Day 3 - Linking
 </a:t>
             </a:r>
-            <a:pPr indent="0" marL="0">
-              <a:lnSpc>
-                <a:spcPts val="1800"/>
-              </a:lnSpc>
-              <a:buNone/>
-            </a:pPr>
             <a:r>
               <a:rPr lang="en-US" sz="1000" dirty="0">
                 <a:solidFill>
@@ -4024,16 +3832,10 @@
               <a:t>  Every pitch has a "because." Use their words. Benefits over features. Broadband labels.
 </a:t>
             </a:r>
-            <a:pPr indent="0" marL="0">
-              <a:lnSpc>
-                <a:spcPts val="1800"/>
-              </a:lnSpc>
-              <a:buNone/>
-            </a:pPr>
             <a:r>
               <a:rPr lang="en-US" sz="1050" b="1" dirty="0">
                 <a:solidFill>
-                  <a:srgbClr val="DC2626"/>
+                  <a:srgbClr val="E67E22"/>
                 </a:solidFill>
                 <a:latin typeface="Segoe UI" pitchFamily="34" charset="0"/>
                 <a:ea typeface="Segoe UI" pitchFamily="34" charset="-122"/>
@@ -4042,12 +3844,6 @@
               <a:t>Day 4 - Objections
 </a:t>
             </a:r>
-            <a:pPr indent="0" marL="0">
-              <a:lnSpc>
-                <a:spcPts val="1800"/>
-              </a:lnSpc>
-              <a:buNone/>
-            </a:pPr>
             <a:r>
               <a:rPr lang="en-US" sz="1000" dirty="0">
                 <a:solidFill>
@@ -4084,6 +3880,13 @@
           </a:solidFill>
           <a:ln/>
         </p:spPr>
+        <p:txBody>
+          <a:bodyPr/>
+          <a:lstStyle/>
+          <a:p>
+            <a:endParaRPr lang="en-US"/>
+          </a:p>
+        </p:txBody>
       </p:sp>
       <p:sp>
         <p:nvSpPr>
@@ -4106,7 +3909,7 @@
           <a:bodyPr wrap="square" rtlCol="0" anchor="ctr"/>
           <a:lstStyle/>
           <a:p>
-            <a:pPr indent="0" marL="0">
+            <a:pPr marL="0" indent="0">
               <a:buNone/>
             </a:pPr>
             <a:r>
@@ -4145,7 +3948,7 @@
           <a:bodyPr wrap="square" rtlCol="0" anchor="ctr"/>
           <a:lstStyle/>
           <a:p>
-            <a:pPr indent="0" marL="0">
+            <a:pPr marL="0" indent="0">
               <a:buNone/>
             </a:pPr>
             <a:r>
@@ -4189,6 +3992,13 @@
             <a:prstDash val="solid"/>
           </a:ln>
         </p:spPr>
+        <p:txBody>
+          <a:bodyPr/>
+          <a:lstStyle/>
+          <a:p>
+            <a:endParaRPr lang="en-US"/>
+          </a:p>
+        </p:txBody>
       </p:sp>
       <p:sp>
         <p:nvSpPr>
@@ -4211,7 +4021,7 @@
           <a:bodyPr wrap="square" rtlCol="0" anchor="ctr"/>
           <a:lstStyle/>
           <a:p>
-            <a:pPr indent="0" marL="0">
+            <a:pPr marL="0" indent="0">
               <a:buNone/>
             </a:pPr>
             <a:r>
@@ -4250,7 +4060,7 @@
           <a:bodyPr wrap="square" rtlCol="0" anchor="ctr"/>
           <a:lstStyle/>
           <a:p>
-            <a:pPr algn="ctr" indent="0" marL="0">
+            <a:pPr marL="0" indent="0" algn="ctr">
               <a:buNone/>
             </a:pPr>
             <a:r>
@@ -4312,6 +4122,13 @@
           </a:solidFill>
           <a:ln/>
         </p:spPr>
+        <p:txBody>
+          <a:bodyPr/>
+          <a:lstStyle/>
+          <a:p>
+            <a:endParaRPr lang="en-US"/>
+          </a:p>
+        </p:txBody>
       </p:sp>
       <p:sp>
         <p:nvSpPr>
@@ -4334,7 +4151,7 @@
           <a:bodyPr wrap="square" rtlCol="0" anchor="ctr"/>
           <a:lstStyle/>
           <a:p>
-            <a:pPr indent="0" marL="0">
+            <a:pPr marL="0" indent="0">
               <a:buNone/>
             </a:pPr>
             <a:r>
@@ -4373,7 +4190,7 @@
           <a:bodyPr wrap="square" rtlCol="0" anchor="ctr"/>
           <a:lstStyle/>
           <a:p>
-            <a:pPr indent="0" marL="0">
+            <a:pPr marL="0" indent="0">
               <a:buNone/>
             </a:pPr>
             <a:r>
@@ -4414,6 +4231,13 @@
           </a:solidFill>
           <a:ln/>
         </p:spPr>
+        <p:txBody>
+          <a:bodyPr/>
+          <a:lstStyle/>
+          <a:p>
+            <a:endParaRPr lang="en-US"/>
+          </a:p>
+        </p:txBody>
       </p:sp>
       <p:sp>
         <p:nvSpPr>
@@ -4436,7 +4260,7 @@
           <a:bodyPr wrap="square" rtlCol="0" anchor="ctr"/>
           <a:lstStyle/>
           <a:p>
-            <a:pPr algn="ctr" indent="0" marL="0">
+            <a:pPr marL="0" indent="0" algn="ctr">
               <a:buNone/>
             </a:pPr>
             <a:r>
@@ -4475,7 +4299,7 @@
           <a:bodyPr wrap="square" rtlCol="0" anchor="ctr"/>
           <a:lstStyle/>
           <a:p>
-            <a:pPr algn="ctr" indent="0" marL="0">
+            <a:pPr marL="0" indent="0" algn="ctr">
               <a:buNone/>
             </a:pPr>
             <a:r>
@@ -4514,6 +4338,13 @@
           </a:solidFill>
           <a:ln/>
         </p:spPr>
+        <p:txBody>
+          <a:bodyPr/>
+          <a:lstStyle/>
+          <a:p>
+            <a:endParaRPr lang="en-US"/>
+          </a:p>
+        </p:txBody>
       </p:sp>
       <p:sp>
         <p:nvSpPr>
@@ -4536,7 +4367,7 @@
           <a:bodyPr wrap="square" rtlCol="0" anchor="ctr"/>
           <a:lstStyle/>
           <a:p>
-            <a:pPr algn="ctr" indent="0" marL="0">
+            <a:pPr marL="0" indent="0" algn="ctr">
               <a:buNone/>
             </a:pPr>
             <a:r>
@@ -4575,7 +4406,7 @@
           <a:bodyPr wrap="square" rtlCol="0" anchor="ctr"/>
           <a:lstStyle/>
           <a:p>
-            <a:pPr indent="0" marL="0">
+            <a:pPr marL="0" indent="0">
               <a:buNone/>
             </a:pPr>
             <a:r>
@@ -4614,7 +4445,7 @@
           <a:bodyPr wrap="square" rtlCol="0" anchor="t"/>
           <a:lstStyle/>
           <a:p>
-            <a:pPr indent="0" marL="0">
+            <a:pPr marL="0" indent="0">
               <a:lnSpc>
                 <a:spcPts val="1600"/>
               </a:lnSpc>
@@ -4656,6 +4487,13 @@
           </a:solidFill>
           <a:ln/>
         </p:spPr>
+        <p:txBody>
+          <a:bodyPr/>
+          <a:lstStyle/>
+          <a:p>
+            <a:endParaRPr lang="en-US"/>
+          </a:p>
+        </p:txBody>
       </p:sp>
       <p:sp>
         <p:nvSpPr>
@@ -4678,7 +4516,7 @@
           <a:bodyPr wrap="square" rtlCol="0" anchor="ctr"/>
           <a:lstStyle/>
           <a:p>
-            <a:pPr algn="ctr" indent="0" marL="0">
+            <a:pPr marL="0" indent="0" algn="ctr">
               <a:buNone/>
             </a:pPr>
             <a:r>
@@ -4717,7 +4555,7 @@
           <a:bodyPr wrap="square" rtlCol="0" anchor="ctr"/>
           <a:lstStyle/>
           <a:p>
-            <a:pPr indent="0" marL="0">
+            <a:pPr marL="0" indent="0">
               <a:buNone/>
             </a:pPr>
             <a:r>
@@ -4756,7 +4594,7 @@
           <a:bodyPr wrap="square" rtlCol="0" anchor="t"/>
           <a:lstStyle/>
           <a:p>
-            <a:pPr indent="0" marL="0">
+            <a:pPr marL="0" indent="0">
               <a:lnSpc>
                 <a:spcPts val="1600"/>
               </a:lnSpc>
@@ -4798,6 +4636,13 @@
           </a:solidFill>
           <a:ln/>
         </p:spPr>
+        <p:txBody>
+          <a:bodyPr/>
+          <a:lstStyle/>
+          <a:p>
+            <a:endParaRPr lang="en-US"/>
+          </a:p>
+        </p:txBody>
       </p:sp>
       <p:sp>
         <p:nvSpPr>
@@ -4820,7 +4665,7 @@
           <a:bodyPr wrap="square" rtlCol="0" anchor="ctr"/>
           <a:lstStyle/>
           <a:p>
-            <a:pPr algn="ctr" indent="0" marL="0">
+            <a:pPr marL="0" indent="0" algn="ctr">
               <a:buNone/>
             </a:pPr>
             <a:r>
@@ -4859,7 +4704,7 @@
           <a:bodyPr wrap="square" rtlCol="0" anchor="ctr"/>
           <a:lstStyle/>
           <a:p>
-            <a:pPr indent="0" marL="0">
+            <a:pPr marL="0" indent="0">
               <a:buNone/>
             </a:pPr>
             <a:r>
@@ -4898,7 +4743,7 @@
           <a:bodyPr wrap="square" rtlCol="0" anchor="t"/>
           <a:lstStyle/>
           <a:p>
-            <a:pPr indent="0" marL="0">
+            <a:pPr marL="0" indent="0">
               <a:lnSpc>
                 <a:spcPts val="1600"/>
               </a:lnSpc>
@@ -4940,6 +4785,13 @@
           </a:solidFill>
           <a:ln/>
         </p:spPr>
+        <p:txBody>
+          <a:bodyPr/>
+          <a:lstStyle/>
+          <a:p>
+            <a:endParaRPr lang="en-US"/>
+          </a:p>
+        </p:txBody>
       </p:sp>
       <p:sp>
         <p:nvSpPr>
@@ -4962,7 +4814,7 @@
           <a:bodyPr wrap="square" rtlCol="0" anchor="ctr"/>
           <a:lstStyle/>
           <a:p>
-            <a:pPr algn="ctr" indent="0" marL="0">
+            <a:pPr marL="0" indent="0" algn="ctr">
               <a:buNone/>
             </a:pPr>
             <a:r>
@@ -5001,7 +4853,7 @@
           <a:bodyPr wrap="square" rtlCol="0" anchor="ctr"/>
           <a:lstStyle/>
           <a:p>
-            <a:pPr indent="0" marL="0">
+            <a:pPr marL="0" indent="0">
               <a:buNone/>
             </a:pPr>
             <a:r>
@@ -5040,7 +4892,7 @@
           <a:bodyPr wrap="square" rtlCol="0" anchor="t"/>
           <a:lstStyle/>
           <a:p>
-            <a:pPr indent="0" marL="0">
+            <a:pPr marL="0" indent="0">
               <a:lnSpc>
                 <a:spcPts val="1600"/>
               </a:lnSpc>
@@ -5082,6 +4934,13 @@
           </a:solidFill>
           <a:ln/>
         </p:spPr>
+        <p:txBody>
+          <a:bodyPr/>
+          <a:lstStyle/>
+          <a:p>
+            <a:endParaRPr lang="en-US"/>
+          </a:p>
+        </p:txBody>
       </p:sp>
       <p:sp>
         <p:nvSpPr>
@@ -5104,7 +4963,7 @@
           <a:bodyPr wrap="square" rtlCol="0" anchor="ctr"/>
           <a:lstStyle/>
           <a:p>
-            <a:pPr algn="ctr" indent="0" marL="0">
+            <a:pPr marL="0" indent="0" algn="ctr">
               <a:buNone/>
             </a:pPr>
             <a:r>
@@ -5143,7 +5002,7 @@
           <a:bodyPr wrap="square" rtlCol="0" anchor="ctr"/>
           <a:lstStyle/>
           <a:p>
-            <a:pPr indent="0" marL="0">
+            <a:pPr marL="0" indent="0">
               <a:buNone/>
             </a:pPr>
             <a:r>
@@ -5182,7 +5041,7 @@
           <a:bodyPr wrap="square" rtlCol="0" anchor="t"/>
           <a:lstStyle/>
           <a:p>
-            <a:pPr indent="0" marL="0">
+            <a:pPr marL="0" indent="0">
               <a:lnSpc>
                 <a:spcPts val="1600"/>
               </a:lnSpc>
@@ -5224,6 +5083,13 @@
           </a:solidFill>
           <a:ln/>
         </p:spPr>
+        <p:txBody>
+          <a:bodyPr/>
+          <a:lstStyle/>
+          <a:p>
+            <a:endParaRPr lang="en-US"/>
+          </a:p>
+        </p:txBody>
       </p:sp>
       <p:sp>
         <p:nvSpPr>
@@ -5246,7 +5112,7 @@
           <a:bodyPr wrap="square" rtlCol="0" anchor="ctr"/>
           <a:lstStyle/>
           <a:p>
-            <a:pPr algn="ctr" indent="0" marL="0">
+            <a:pPr marL="0" indent="0" algn="ctr">
               <a:buNone/>
             </a:pPr>
             <a:r>
@@ -5285,7 +5151,7 @@
           <a:bodyPr wrap="square" rtlCol="0" anchor="ctr"/>
           <a:lstStyle/>
           <a:p>
-            <a:pPr indent="0" marL="0">
+            <a:pPr marL="0" indent="0">
               <a:buNone/>
             </a:pPr>
             <a:r>
@@ -5324,7 +5190,7 @@
           <a:bodyPr wrap="square" rtlCol="0" anchor="t"/>
           <a:lstStyle/>
           <a:p>
-            <a:pPr indent="0" marL="0">
+            <a:pPr marL="0" indent="0">
               <a:lnSpc>
                 <a:spcPts val="1600"/>
               </a:lnSpc>
@@ -5366,6 +5232,13 @@
           </a:solidFill>
           <a:ln/>
         </p:spPr>
+        <p:txBody>
+          <a:bodyPr/>
+          <a:lstStyle/>
+          <a:p>
+            <a:endParaRPr lang="en-US"/>
+          </a:p>
+        </p:txBody>
       </p:sp>
       <p:sp>
         <p:nvSpPr>
@@ -5388,7 +5261,7 @@
           <a:bodyPr wrap="square" rtlCol="0" anchor="ctr"/>
           <a:lstStyle/>
           <a:p>
-            <a:pPr algn="ctr" indent="0" marL="0">
+            <a:pPr marL="0" indent="0" algn="ctr">
               <a:buNone/>
             </a:pPr>
             <a:r>
@@ -5427,7 +5300,7 @@
           <a:bodyPr wrap="square" rtlCol="0" anchor="ctr"/>
           <a:lstStyle/>
           <a:p>
-            <a:pPr indent="0" marL="0">
+            <a:pPr marL="0" indent="0">
               <a:buNone/>
             </a:pPr>
             <a:r>
@@ -5466,7 +5339,7 @@
           <a:bodyPr wrap="square" rtlCol="0" anchor="t"/>
           <a:lstStyle/>
           <a:p>
-            <a:pPr indent="0" marL="0">
+            <a:pPr marL="0" indent="0">
               <a:lnSpc>
                 <a:spcPts val="1600"/>
               </a:lnSpc>
@@ -5513,6 +5386,13 @@
             <a:prstDash val="solid"/>
           </a:ln>
         </p:spPr>
+        <p:txBody>
+          <a:bodyPr/>
+          <a:lstStyle/>
+          <a:p>
+            <a:endParaRPr lang="en-US"/>
+          </a:p>
+        </p:txBody>
       </p:sp>
       <p:sp>
         <p:nvSpPr>
@@ -5535,7 +5415,7 @@
           <a:bodyPr wrap="square" rtlCol="0" anchor="ctr"/>
           <a:lstStyle/>
           <a:p>
-            <a:pPr indent="0" marL="0">
+            <a:pPr marL="0" indent="0">
               <a:buNone/>
             </a:pPr>
             <a:r>
@@ -5574,7 +5454,7 @@
           <a:bodyPr wrap="square" rtlCol="0" anchor="ctr"/>
           <a:lstStyle/>
           <a:p>
-            <a:pPr algn="ctr" indent="0" marL="0">
+            <a:pPr marL="0" indent="0" algn="ctr">
               <a:buNone/>
             </a:pPr>
             <a:r>
@@ -5636,6 +5516,13 @@
           </a:solidFill>
           <a:ln/>
         </p:spPr>
+        <p:txBody>
+          <a:bodyPr/>
+          <a:lstStyle/>
+          <a:p>
+            <a:endParaRPr lang="en-US"/>
+          </a:p>
+        </p:txBody>
       </p:sp>
       <p:sp>
         <p:nvSpPr>
@@ -5658,7 +5545,7 @@
           <a:bodyPr wrap="square" rtlCol="0" anchor="ctr"/>
           <a:lstStyle/>
           <a:p>
-            <a:pPr indent="0" marL="0">
+            <a:pPr marL="0" indent="0">
               <a:buNone/>
             </a:pPr>
             <a:r>
@@ -5697,7 +5584,7 @@
           <a:bodyPr wrap="square" rtlCol="0" anchor="ctr"/>
           <a:lstStyle/>
           <a:p>
-            <a:pPr indent="0" marL="0">
+            <a:pPr marL="0" indent="0">
               <a:buNone/>
             </a:pPr>
             <a:r>
@@ -5738,6 +5625,13 @@
           </a:solidFill>
           <a:ln/>
         </p:spPr>
+        <p:txBody>
+          <a:bodyPr/>
+          <a:lstStyle/>
+          <a:p>
+            <a:endParaRPr lang="en-US"/>
+          </a:p>
+        </p:txBody>
       </p:sp>
       <p:sp>
         <p:nvSpPr>
@@ -5760,7 +5654,7 @@
           <a:bodyPr wrap="square" rtlCol="0" anchor="ctr"/>
           <a:lstStyle/>
           <a:p>
-            <a:pPr algn="ctr" indent="0" marL="0">
+            <a:pPr marL="0" indent="0" algn="ctr">
               <a:buNone/>
             </a:pPr>
             <a:r>
@@ -5799,7 +5693,7 @@
           <a:bodyPr wrap="square" rtlCol="0" anchor="ctr"/>
           <a:lstStyle/>
           <a:p>
-            <a:pPr algn="ctr" indent="0" marL="0">
+            <a:pPr marL="0" indent="0" algn="ctr">
               <a:buNone/>
             </a:pPr>
             <a:r>
@@ -5838,6 +5732,13 @@
           </a:solidFill>
           <a:ln/>
         </p:spPr>
+        <p:txBody>
+          <a:bodyPr/>
+          <a:lstStyle/>
+          <a:p>
+            <a:endParaRPr lang="en-US"/>
+          </a:p>
+        </p:txBody>
       </p:sp>
       <p:sp>
         <p:nvSpPr>
@@ -5860,7 +5761,7 @@
           <a:bodyPr wrap="square" rtlCol="0" anchor="ctr"/>
           <a:lstStyle/>
           <a:p>
-            <a:pPr indent="0" marL="0">
+            <a:pPr marL="0" indent="0">
               <a:buNone/>
             </a:pPr>
             <a:r>
@@ -5899,7 +5800,7 @@
           <a:bodyPr wrap="square" rtlCol="0" anchor="ctr"/>
           <a:lstStyle/>
           <a:p>
-            <a:pPr indent="0" marL="0">
+            <a:pPr marL="0" indent="0">
               <a:lnSpc>
                 <a:spcPts val="2000"/>
               </a:lnSpc>
@@ -5916,12 +5817,6 @@
               </a:rPr>
               <a:t>Setup: </a:t>
             </a:r>
-            <a:pPr indent="0" marL="0">
-              <a:lnSpc>
-                <a:spcPts val="2000"/>
-              </a:lnSpc>
-              <a:buNone/>
-            </a:pPr>
             <a:r>
               <a:rPr lang="en-US" sz="1050" dirty="0">
                 <a:solidFill>
@@ -5934,12 +5829,6 @@
               <a:t>Pair up. One plays customer ("Hello?"), one plays agent. Full opening in 30 seconds. Stopwatch.
 </a:t>
             </a:r>
-            <a:pPr indent="0" marL="0">
-              <a:lnSpc>
-                <a:spcPts val="2000"/>
-              </a:lnSpc>
-              <a:buNone/>
-            </a:pPr>
             <a:r>
               <a:rPr lang="en-US" sz="1050" b="1" dirty="0">
                 <a:solidFill>
@@ -5951,12 +5840,6 @@
               </a:rPr>
               <a:t>Rules: </a:t>
             </a:r>
-            <a:pPr indent="0" marL="0">
-              <a:lnSpc>
-                <a:spcPts val="2000"/>
-              </a:lnSpc>
-              <a:buNone/>
-            </a:pPr>
             <a:r>
               <a:rPr lang="en-US" sz="1050" dirty="0">
                 <a:solidFill>
@@ -5969,12 +5852,6 @@
               <a:t>Must include a genuine personal connection (not just "How are you?"). Disclosure before 30s mark.
 </a:t>
             </a:r>
-            <a:pPr indent="0" marL="0">
-              <a:lnSpc>
-                <a:spcPts val="2000"/>
-              </a:lnSpc>
-              <a:buNone/>
-            </a:pPr>
             <a:r>
               <a:rPr lang="en-US" sz="1050" b="1" dirty="0">
                 <a:solidFill>
@@ -5986,12 +5863,6 @@
               </a:rPr>
               <a:t>Debrief: </a:t>
             </a:r>
-            <a:pPr indent="0" marL="0">
-              <a:lnSpc>
-                <a:spcPts val="2000"/>
-              </a:lnSpc>
-              <a:buNone/>
-            </a:pPr>
             <a:r>
               <a:rPr lang="en-US" sz="1050" dirty="0">
                 <a:solidFill>
@@ -6028,6 +5899,13 @@
           </a:solidFill>
           <a:ln/>
         </p:spPr>
+        <p:txBody>
+          <a:bodyPr/>
+          <a:lstStyle/>
+          <a:p>
+            <a:endParaRPr lang="en-US"/>
+          </a:p>
+        </p:txBody>
       </p:sp>
       <p:sp>
         <p:nvSpPr>
@@ -6050,7 +5928,7 @@
           <a:bodyPr wrap="square" rtlCol="0" anchor="ctr"/>
           <a:lstStyle/>
           <a:p>
-            <a:pPr indent="0" marL="0">
+            <a:pPr marL="0" indent="0">
               <a:buNone/>
             </a:pPr>
             <a:r>
@@ -6089,7 +5967,7 @@
           <a:bodyPr wrap="square" rtlCol="0" anchor="ctr"/>
           <a:lstStyle/>
           <a:p>
-            <a:pPr indent="0" marL="0">
+            <a:pPr marL="0" indent="0">
               <a:lnSpc>
                 <a:spcPts val="2000"/>
               </a:lnSpc>
@@ -6109,7 +5987,7 @@
             <a:endParaRPr lang="en-US" sz="1050" dirty="0"/>
           </a:p>
           <a:p>
-            <a:pPr indent="0" marL="0">
+            <a:pPr marL="0" indent="0">
               <a:lnSpc>
                 <a:spcPts val="2000"/>
               </a:lnSpc>
@@ -6129,7 +6007,7 @@
             <a:endParaRPr lang="en-US" sz="1050" dirty="0"/>
           </a:p>
           <a:p>
-            <a:pPr indent="0" marL="0">
+            <a:pPr marL="0" indent="0">
               <a:lnSpc>
                 <a:spcPts val="2000"/>
               </a:lnSpc>
@@ -6149,7 +6027,7 @@
             <a:endParaRPr lang="en-US" sz="1050" dirty="0"/>
           </a:p>
           <a:p>
-            <a:pPr indent="0" marL="0">
+            <a:pPr marL="0" indent="0">
               <a:lnSpc>
                 <a:spcPts val="2000"/>
               </a:lnSpc>
@@ -6191,7 +6069,7 @@
           <a:bodyPr wrap="square" rtlCol="0" anchor="ctr"/>
           <a:lstStyle/>
           <a:p>
-            <a:pPr indent="0" marL="0">
+            <a:pPr marL="0" indent="0">
               <a:lnSpc>
                 <a:spcPts val="1800"/>
               </a:lnSpc>
@@ -6211,7 +6089,7 @@
             <a:endParaRPr lang="en-US" sz="1000" dirty="0"/>
           </a:p>
           <a:p>
-            <a:pPr indent="0" marL="0">
+            <a:pPr marL="0" indent="0">
               <a:lnSpc>
                 <a:spcPts val="1800"/>
               </a:lnSpc>
@@ -6231,7 +6109,7 @@
             <a:endParaRPr lang="en-US" sz="1000" dirty="0"/>
           </a:p>
           <a:p>
-            <a:pPr indent="0" marL="0">
+            <a:pPr marL="0" indent="0">
               <a:lnSpc>
                 <a:spcPts val="1800"/>
               </a:lnSpc>
@@ -6251,7 +6129,7 @@
             <a:endParaRPr lang="en-US" sz="1000" dirty="0"/>
           </a:p>
           <a:p>
-            <a:pPr indent="0" marL="0">
+            <a:pPr marL="0" indent="0">
               <a:lnSpc>
                 <a:spcPts val="1800"/>
               </a:lnSpc>
@@ -6293,6 +6171,13 @@
           </a:solidFill>
           <a:ln/>
         </p:spPr>
+        <p:txBody>
+          <a:bodyPr/>
+          <a:lstStyle/>
+          <a:p>
+            <a:endParaRPr lang="en-US"/>
+          </a:p>
+        </p:txBody>
       </p:sp>
       <p:sp>
         <p:nvSpPr>
@@ -6315,7 +6200,7 @@
           <a:bodyPr wrap="square" rtlCol="0" anchor="ctr"/>
           <a:lstStyle/>
           <a:p>
-            <a:pPr indent="0" marL="0">
+            <a:pPr marL="0" indent="0">
               <a:buNone/>
             </a:pPr>
             <a:r>
@@ -6354,7 +6239,7 @@
           <a:bodyPr wrap="square" rtlCol="0" anchor="ctr"/>
           <a:lstStyle/>
           <a:p>
-            <a:pPr indent="0" marL="0">
+            <a:pPr marL="0" indent="0">
               <a:lnSpc>
                 <a:spcPts val="2000"/>
               </a:lnSpc>
@@ -6374,7 +6259,7 @@
             <a:endParaRPr lang="en-US" sz="1100" dirty="0"/>
           </a:p>
           <a:p>
-            <a:pPr indent="0" marL="0">
+            <a:pPr marL="0" indent="0">
               <a:lnSpc>
                 <a:spcPts val="2000"/>
               </a:lnSpc>
@@ -6394,7 +6279,7 @@
             <a:endParaRPr lang="en-US" sz="1100" dirty="0"/>
           </a:p>
           <a:p>
-            <a:pPr indent="0" marL="0">
+            <a:pPr marL="0" indent="0">
               <a:lnSpc>
                 <a:spcPts val="2000"/>
               </a:lnSpc>
@@ -6414,7 +6299,7 @@
             <a:endParaRPr lang="en-US" sz="1100" dirty="0"/>
           </a:p>
           <a:p>
-            <a:pPr indent="0" marL="0">
+            <a:pPr marL="0" indent="0">
               <a:lnSpc>
                 <a:spcPts val="2000"/>
               </a:lnSpc>
@@ -6461,6 +6346,13 @@
             <a:prstDash val="solid"/>
           </a:ln>
         </p:spPr>
+        <p:txBody>
+          <a:bodyPr/>
+          <a:lstStyle/>
+          <a:p>
+            <a:endParaRPr lang="en-US"/>
+          </a:p>
+        </p:txBody>
       </p:sp>
       <p:sp>
         <p:nvSpPr>
@@ -6483,7 +6375,7 @@
           <a:bodyPr wrap="square" rtlCol="0" anchor="ctr"/>
           <a:lstStyle/>
           <a:p>
-            <a:pPr indent="0" marL="0">
+            <a:pPr marL="0" indent="0">
               <a:buNone/>
             </a:pPr>
             <a:r>
@@ -6522,7 +6414,7 @@
           <a:bodyPr wrap="square" rtlCol="0" anchor="ctr"/>
           <a:lstStyle/>
           <a:p>
-            <a:pPr algn="ctr" indent="0" marL="0">
+            <a:pPr marL="0" indent="0" algn="ctr">
               <a:buNone/>
             </a:pPr>
             <a:r>
@@ -6584,6 +6476,13 @@
           </a:solidFill>
           <a:ln/>
         </p:spPr>
+        <p:txBody>
+          <a:bodyPr/>
+          <a:lstStyle/>
+          <a:p>
+            <a:endParaRPr lang="en-US"/>
+          </a:p>
+        </p:txBody>
       </p:sp>
       <p:sp>
         <p:nvSpPr>
@@ -6606,7 +6505,7 @@
           <a:bodyPr wrap="square" rtlCol="0" anchor="ctr"/>
           <a:lstStyle/>
           <a:p>
-            <a:pPr indent="0" marL="0">
+            <a:pPr marL="0" indent="0">
               <a:buNone/>
             </a:pPr>
             <a:r>
@@ -6645,7 +6544,7 @@
           <a:bodyPr wrap="square" rtlCol="0" anchor="ctr"/>
           <a:lstStyle/>
           <a:p>
-            <a:pPr indent="0" marL="0">
+            <a:pPr marL="0" indent="0">
               <a:buNone/>
             </a:pPr>
             <a:r>
@@ -6686,6 +6585,13 @@
           </a:solidFill>
           <a:ln/>
         </p:spPr>
+        <p:txBody>
+          <a:bodyPr/>
+          <a:lstStyle/>
+          <a:p>
+            <a:endParaRPr lang="en-US"/>
+          </a:p>
+        </p:txBody>
       </p:sp>
       <p:sp>
         <p:nvSpPr>
@@ -6708,7 +6614,7 @@
           <a:bodyPr wrap="square" rtlCol="0" anchor="ctr"/>
           <a:lstStyle/>
           <a:p>
-            <a:pPr algn="ctr" indent="0" marL="0">
+            <a:pPr marL="0" indent="0" algn="ctr">
               <a:buNone/>
             </a:pPr>
             <a:r>
@@ -6747,7 +6653,7 @@
           <a:bodyPr wrap="square" rtlCol="0" anchor="ctr"/>
           <a:lstStyle/>
           <a:p>
-            <a:pPr algn="ctr" indent="0" marL="0">
+            <a:pPr marL="0" indent="0" algn="ctr">
               <a:buNone/>
             </a:pPr>
             <a:r>
@@ -6786,6 +6692,13 @@
           </a:solidFill>
           <a:ln/>
         </p:spPr>
+        <p:txBody>
+          <a:bodyPr/>
+          <a:lstStyle/>
+          <a:p>
+            <a:endParaRPr lang="en-US"/>
+          </a:p>
+        </p:txBody>
       </p:sp>
       <p:sp>
         <p:nvSpPr>
@@ -6808,7 +6721,7 @@
           <a:bodyPr wrap="square" rtlCol="0" anchor="ctr"/>
           <a:lstStyle/>
           <a:p>
-            <a:pPr algn="ctr" indent="0" marL="0">
+            <a:pPr marL="0" indent="0" algn="ctr">
               <a:buNone/>
             </a:pPr>
             <a:r>
@@ -6847,7 +6760,7 @@
           <a:bodyPr wrap="square" rtlCol="0" anchor="ctr"/>
           <a:lstStyle/>
           <a:p>
-            <a:pPr indent="0" marL="0">
+            <a:pPr marL="0" indent="0">
               <a:buNone/>
             </a:pPr>
             <a:r>
@@ -6886,7 +6799,7 @@
           <a:bodyPr wrap="square" rtlCol="0" anchor="t"/>
           <a:lstStyle/>
           <a:p>
-            <a:pPr indent="0" marL="0">
+            <a:pPr marL="0" indent="0">
               <a:lnSpc>
                 <a:spcPts val="1600"/>
               </a:lnSpc>
@@ -6928,6 +6841,13 @@
           </a:solidFill>
           <a:ln/>
         </p:spPr>
+        <p:txBody>
+          <a:bodyPr/>
+          <a:lstStyle/>
+          <a:p>
+            <a:endParaRPr lang="en-US"/>
+          </a:p>
+        </p:txBody>
       </p:sp>
       <p:sp>
         <p:nvSpPr>
@@ -6950,7 +6870,7 @@
           <a:bodyPr wrap="square" rtlCol="0" anchor="ctr"/>
           <a:lstStyle/>
           <a:p>
-            <a:pPr algn="ctr" indent="0" marL="0">
+            <a:pPr marL="0" indent="0" algn="ctr">
               <a:buNone/>
             </a:pPr>
             <a:r>
@@ -6989,7 +6909,7 @@
           <a:bodyPr wrap="square" rtlCol="0" anchor="ctr"/>
           <a:lstStyle/>
           <a:p>
-            <a:pPr indent="0" marL="0">
+            <a:pPr marL="0" indent="0">
               <a:buNone/>
             </a:pPr>
             <a:r>
@@ -7028,7 +6948,7 @@
           <a:bodyPr wrap="square" rtlCol="0" anchor="t"/>
           <a:lstStyle/>
           <a:p>
-            <a:pPr indent="0" marL="0">
+            <a:pPr marL="0" indent="0">
               <a:lnSpc>
                 <a:spcPts val="1600"/>
               </a:lnSpc>
@@ -7070,6 +6990,13 @@
           </a:solidFill>
           <a:ln/>
         </p:spPr>
+        <p:txBody>
+          <a:bodyPr/>
+          <a:lstStyle/>
+          <a:p>
+            <a:endParaRPr lang="en-US"/>
+          </a:p>
+        </p:txBody>
       </p:sp>
       <p:sp>
         <p:nvSpPr>
@@ -7092,7 +7019,7 @@
           <a:bodyPr wrap="square" rtlCol="0" anchor="ctr"/>
           <a:lstStyle/>
           <a:p>
-            <a:pPr algn="ctr" indent="0" marL="0">
+            <a:pPr marL="0" indent="0" algn="ctr">
               <a:buNone/>
             </a:pPr>
             <a:r>
@@ -7131,7 +7058,7 @@
           <a:bodyPr wrap="square" rtlCol="0" anchor="ctr"/>
           <a:lstStyle/>
           <a:p>
-            <a:pPr indent="0" marL="0">
+            <a:pPr marL="0" indent="0">
               <a:buNone/>
             </a:pPr>
             <a:r>
@@ -7170,7 +7097,7 @@
           <a:bodyPr wrap="square" rtlCol="0" anchor="t"/>
           <a:lstStyle/>
           <a:p>
-            <a:pPr indent="0" marL="0">
+            <a:pPr marL="0" indent="0">
               <a:lnSpc>
                 <a:spcPts val="1600"/>
               </a:lnSpc>
@@ -7212,6 +7139,13 @@
           </a:solidFill>
           <a:ln/>
         </p:spPr>
+        <p:txBody>
+          <a:bodyPr/>
+          <a:lstStyle/>
+          <a:p>
+            <a:endParaRPr lang="en-US"/>
+          </a:p>
+        </p:txBody>
       </p:sp>
       <p:sp>
         <p:nvSpPr>
@@ -7234,7 +7168,7 @@
           <a:bodyPr wrap="square" rtlCol="0" anchor="ctr"/>
           <a:lstStyle/>
           <a:p>
-            <a:pPr algn="ctr" indent="0" marL="0">
+            <a:pPr marL="0" indent="0" algn="ctr">
               <a:buNone/>
             </a:pPr>
             <a:r>
@@ -7273,7 +7207,7 @@
           <a:bodyPr wrap="square" rtlCol="0" anchor="ctr"/>
           <a:lstStyle/>
           <a:p>
-            <a:pPr indent="0" marL="0">
+            <a:pPr marL="0" indent="0">
               <a:buNone/>
             </a:pPr>
             <a:r>
@@ -7312,7 +7246,7 @@
           <a:bodyPr wrap="square" rtlCol="0" anchor="t"/>
           <a:lstStyle/>
           <a:p>
-            <a:pPr indent="0" marL="0">
+            <a:pPr marL="0" indent="0">
               <a:lnSpc>
                 <a:spcPts val="1600"/>
               </a:lnSpc>
@@ -7354,6 +7288,13 @@
           </a:solidFill>
           <a:ln/>
         </p:spPr>
+        <p:txBody>
+          <a:bodyPr/>
+          <a:lstStyle/>
+          <a:p>
+            <a:endParaRPr lang="en-US"/>
+          </a:p>
+        </p:txBody>
       </p:sp>
       <p:sp>
         <p:nvSpPr>
@@ -7376,7 +7317,7 @@
           <a:bodyPr wrap="square" rtlCol="0" anchor="ctr"/>
           <a:lstStyle/>
           <a:p>
-            <a:pPr algn="ctr" indent="0" marL="0">
+            <a:pPr marL="0" indent="0" algn="ctr">
               <a:buNone/>
             </a:pPr>
             <a:r>
@@ -7415,7 +7356,7 @@
           <a:bodyPr wrap="square" rtlCol="0" anchor="ctr"/>
           <a:lstStyle/>
           <a:p>
-            <a:pPr indent="0" marL="0">
+            <a:pPr marL="0" indent="0">
               <a:buNone/>
             </a:pPr>
             <a:r>
@@ -7454,7 +7395,7 @@
           <a:bodyPr wrap="square" rtlCol="0" anchor="t"/>
           <a:lstStyle/>
           <a:p>
-            <a:pPr indent="0" marL="0">
+            <a:pPr marL="0" indent="0">
               <a:lnSpc>
                 <a:spcPts val="1600"/>
               </a:lnSpc>
@@ -7496,6 +7437,13 @@
           </a:solidFill>
           <a:ln/>
         </p:spPr>
+        <p:txBody>
+          <a:bodyPr/>
+          <a:lstStyle/>
+          <a:p>
+            <a:endParaRPr lang="en-US"/>
+          </a:p>
+        </p:txBody>
       </p:sp>
       <p:sp>
         <p:nvSpPr>
@@ -7518,7 +7466,7 @@
           <a:bodyPr wrap="square" rtlCol="0" anchor="ctr"/>
           <a:lstStyle/>
           <a:p>
-            <a:pPr algn="ctr" indent="0" marL="0">
+            <a:pPr marL="0" indent="0" algn="ctr">
               <a:buNone/>
             </a:pPr>
             <a:r>
@@ -7557,7 +7505,7 @@
           <a:bodyPr wrap="square" rtlCol="0" anchor="ctr"/>
           <a:lstStyle/>
           <a:p>
-            <a:pPr indent="0" marL="0">
+            <a:pPr marL="0" indent="0">
               <a:buNone/>
             </a:pPr>
             <a:r>
@@ -7596,7 +7544,7 @@
           <a:bodyPr wrap="square" rtlCol="0" anchor="t"/>
           <a:lstStyle/>
           <a:p>
-            <a:pPr indent="0" marL="0">
+            <a:pPr marL="0" indent="0">
               <a:lnSpc>
                 <a:spcPts val="1600"/>
               </a:lnSpc>
@@ -7638,6 +7586,13 @@
           </a:solidFill>
           <a:ln/>
         </p:spPr>
+        <p:txBody>
+          <a:bodyPr/>
+          <a:lstStyle/>
+          <a:p>
+            <a:endParaRPr lang="en-US"/>
+          </a:p>
+        </p:txBody>
       </p:sp>
       <p:sp>
         <p:nvSpPr>
@@ -7660,7 +7615,7 @@
           <a:bodyPr wrap="square" rtlCol="0" anchor="ctr"/>
           <a:lstStyle/>
           <a:p>
-            <a:pPr algn="ctr" indent="0" marL="0">
+            <a:pPr marL="0" indent="0" algn="ctr">
               <a:buNone/>
             </a:pPr>
             <a:r>
@@ -7699,7 +7654,7 @@
           <a:bodyPr wrap="square" rtlCol="0" anchor="ctr"/>
           <a:lstStyle/>
           <a:p>
-            <a:pPr indent="0" marL="0">
+            <a:pPr marL="0" indent="0">
               <a:buNone/>
             </a:pPr>
             <a:r>
@@ -7738,7 +7693,7 @@
           <a:bodyPr wrap="square" rtlCol="0" anchor="t"/>
           <a:lstStyle/>
           <a:p>
-            <a:pPr indent="0" marL="0">
+            <a:pPr marL="0" indent="0">
               <a:lnSpc>
                 <a:spcPts val="1600"/>
               </a:lnSpc>
@@ -7785,6 +7740,13 @@
             <a:prstDash val="solid"/>
           </a:ln>
         </p:spPr>
+        <p:txBody>
+          <a:bodyPr/>
+          <a:lstStyle/>
+          <a:p>
+            <a:endParaRPr lang="en-US"/>
+          </a:p>
+        </p:txBody>
       </p:sp>
       <p:sp>
         <p:nvSpPr>
@@ -7807,7 +7769,7 @@
           <a:bodyPr wrap="square" rtlCol="0" anchor="ctr"/>
           <a:lstStyle/>
           <a:p>
-            <a:pPr indent="0" marL="0">
+            <a:pPr marL="0" indent="0">
               <a:buNone/>
             </a:pPr>
             <a:r>
@@ -7846,7 +7808,7 @@
           <a:bodyPr wrap="square" rtlCol="0" anchor="ctr"/>
           <a:lstStyle/>
           <a:p>
-            <a:pPr algn="ctr" indent="0" marL="0">
+            <a:pPr marL="0" indent="0" algn="ctr">
               <a:buNone/>
             </a:pPr>
             <a:r>
@@ -7908,6 +7870,13 @@
           </a:solidFill>
           <a:ln/>
         </p:spPr>
+        <p:txBody>
+          <a:bodyPr/>
+          <a:lstStyle/>
+          <a:p>
+            <a:endParaRPr lang="en-US"/>
+          </a:p>
+        </p:txBody>
       </p:sp>
       <p:sp>
         <p:nvSpPr>
@@ -7930,7 +7899,7 @@
           <a:bodyPr wrap="square" rtlCol="0" anchor="ctr"/>
           <a:lstStyle/>
           <a:p>
-            <a:pPr indent="0" marL="0">
+            <a:pPr marL="0" indent="0">
               <a:buNone/>
             </a:pPr>
             <a:r>
@@ -7969,7 +7938,7 @@
           <a:bodyPr wrap="square" rtlCol="0" anchor="ctr"/>
           <a:lstStyle/>
           <a:p>
-            <a:pPr indent="0" marL="0">
+            <a:pPr marL="0" indent="0">
               <a:buNone/>
             </a:pPr>
             <a:r>
@@ -8010,6 +7979,13 @@
           </a:solidFill>
           <a:ln/>
         </p:spPr>
+        <p:txBody>
+          <a:bodyPr/>
+          <a:lstStyle/>
+          <a:p>
+            <a:endParaRPr lang="en-US"/>
+          </a:p>
+        </p:txBody>
       </p:sp>
       <p:sp>
         <p:nvSpPr>
@@ -8032,7 +8008,7 @@
           <a:bodyPr wrap="square" rtlCol="0" anchor="ctr"/>
           <a:lstStyle/>
           <a:p>
-            <a:pPr algn="ctr" indent="0" marL="0">
+            <a:pPr marL="0" indent="0" algn="ctr">
               <a:buNone/>
             </a:pPr>
             <a:r>
@@ -8071,7 +8047,7 @@
           <a:bodyPr wrap="square" rtlCol="0" anchor="ctr"/>
           <a:lstStyle/>
           <a:p>
-            <a:pPr algn="ctr" indent="0" marL="0">
+            <a:pPr marL="0" indent="0" algn="ctr">
               <a:buNone/>
             </a:pPr>
             <a:r>
@@ -8110,6 +8086,13 @@
           </a:solidFill>
           <a:ln/>
         </p:spPr>
+        <p:txBody>
+          <a:bodyPr/>
+          <a:lstStyle/>
+          <a:p>
+            <a:endParaRPr lang="en-US"/>
+          </a:p>
+        </p:txBody>
       </p:sp>
       <p:sp>
         <p:nvSpPr>
@@ -8132,7 +8115,7 @@
           <a:bodyPr wrap="square" rtlCol="0" anchor="ctr"/>
           <a:lstStyle/>
           <a:p>
-            <a:pPr indent="0" marL="0">
+            <a:pPr marL="0" indent="0">
               <a:buNone/>
             </a:pPr>
             <a:r>
@@ -8171,7 +8154,7 @@
           <a:bodyPr wrap="square" rtlCol="0" anchor="ctr"/>
           <a:lstStyle/>
           <a:p>
-            <a:pPr indent="0" marL="0">
+            <a:pPr marL="0" indent="0">
               <a:lnSpc>
                 <a:spcPts val="2000"/>
               </a:lnSpc>
@@ -8188,12 +8171,6 @@
               </a:rPr>
               <a:t>Setup: </a:t>
             </a:r>
-            <a:pPr indent="0" marL="0">
-              <a:lnSpc>
-                <a:spcPts val="2000"/>
-              </a:lnSpc>
-              <a:buNone/>
-            </a:pPr>
             <a:r>
               <a:rPr lang="en-US" sz="1050" dirty="0">
                 <a:solidFill>
@@ -8206,12 +8183,6 @@
               <a:t>2x2 grid (Users/Usage/Devices/Cost). Pair up. Customer uses persona card. Agent has 3 min to fill all 4 boxes.
 </a:t>
             </a:r>
-            <a:pPr indent="0" marL="0">
-              <a:lnSpc>
-                <a:spcPts val="2000"/>
-              </a:lnSpc>
-              <a:buNone/>
-            </a:pPr>
             <a:r>
               <a:rPr lang="en-US" sz="1050" b="1" dirty="0">
                 <a:solidFill>
@@ -8223,12 +8194,6 @@
               </a:rPr>
               <a:t>Rules: </a:t>
             </a:r>
-            <a:pPr indent="0" marL="0">
-              <a:lnSpc>
-                <a:spcPts val="2000"/>
-              </a:lnSpc>
-              <a:buNone/>
-            </a:pPr>
             <a:r>
               <a:rPr lang="en-US" sz="1050" dirty="0">
                 <a:solidFill>
@@ -8241,12 +8206,6 @@
               <a:t>Open-ended questions only. If agent asks a closed question, customer calls it out and agent rephrases.
 </a:t>
             </a:r>
-            <a:pPr indent="0" marL="0">
-              <a:lnSpc>
-                <a:spcPts val="2000"/>
-              </a:lnSpc>
-              <a:buNone/>
-            </a:pPr>
             <a:r>
               <a:rPr lang="en-US" sz="1050" b="1" dirty="0">
                 <a:solidFill>
@@ -8258,12 +8217,6 @@
               </a:rPr>
               <a:t>Debrief: </a:t>
             </a:r>
-            <a:pPr indent="0" marL="0">
-              <a:lnSpc>
-                <a:spcPts val="2000"/>
-              </a:lnSpc>
-              <a:buNone/>
-            </a:pPr>
             <a:r>
               <a:rPr lang="en-US" sz="1050" dirty="0">
                 <a:solidFill>
@@ -8300,6 +8253,13 @@
           </a:solidFill>
           <a:ln/>
         </p:spPr>
+        <p:txBody>
+          <a:bodyPr/>
+          <a:lstStyle/>
+          <a:p>
+            <a:endParaRPr lang="en-US"/>
+          </a:p>
+        </p:txBody>
       </p:sp>
       <p:sp>
         <p:nvSpPr>
@@ -8322,7 +8282,7 @@
           <a:bodyPr wrap="square" rtlCol="0" anchor="ctr"/>
           <a:lstStyle/>
           <a:p>
-            <a:pPr indent="0" marL="0">
+            <a:pPr marL="0" indent="0">
               <a:buNone/>
             </a:pPr>
             <a:r>
@@ -8361,7 +8321,7 @@
           <a:bodyPr wrap="square" rtlCol="0" anchor="ctr"/>
           <a:lstStyle/>
           <a:p>
-            <a:pPr indent="0" marL="0">
+            <a:pPr marL="0" indent="0">
               <a:lnSpc>
                 <a:spcPts val="2000"/>
               </a:lnSpc>
@@ -8381,7 +8341,7 @@
             <a:endParaRPr lang="en-US" sz="1050" dirty="0"/>
           </a:p>
           <a:p>
-            <a:pPr indent="0" marL="0">
+            <a:pPr marL="0" indent="0">
               <a:lnSpc>
                 <a:spcPts val="2000"/>
               </a:lnSpc>
@@ -8401,7 +8361,7 @@
             <a:endParaRPr lang="en-US" sz="1050" dirty="0"/>
           </a:p>
           <a:p>
-            <a:pPr indent="0" marL="0">
+            <a:pPr marL="0" indent="0">
               <a:lnSpc>
                 <a:spcPts val="2000"/>
               </a:lnSpc>
@@ -8421,7 +8381,7 @@
             <a:endParaRPr lang="en-US" sz="1050" dirty="0"/>
           </a:p>
           <a:p>
-            <a:pPr indent="0" marL="0">
+            <a:pPr marL="0" indent="0">
               <a:lnSpc>
                 <a:spcPts val="2000"/>
               </a:lnSpc>
@@ -8463,7 +8423,7 @@
           <a:bodyPr wrap="square" rtlCol="0" anchor="ctr"/>
           <a:lstStyle/>
           <a:p>
-            <a:pPr indent="0" marL="0">
+            <a:pPr marL="0" indent="0">
               <a:lnSpc>
                 <a:spcPts val="1800"/>
               </a:lnSpc>
@@ -8483,7 +8443,7 @@
             <a:endParaRPr lang="en-US" sz="1000" dirty="0"/>
           </a:p>
           <a:p>
-            <a:pPr indent="0" marL="0">
+            <a:pPr marL="0" indent="0">
               <a:lnSpc>
                 <a:spcPts val="1800"/>
               </a:lnSpc>
@@ -8503,7 +8463,7 @@
             <a:endParaRPr lang="en-US" sz="1000" dirty="0"/>
           </a:p>
           <a:p>
-            <a:pPr indent="0" marL="0">
+            <a:pPr marL="0" indent="0">
               <a:lnSpc>
                 <a:spcPts val="1800"/>
               </a:lnSpc>
@@ -8523,7 +8483,7 @@
             <a:endParaRPr lang="en-US" sz="1000" dirty="0"/>
           </a:p>
           <a:p>
-            <a:pPr indent="0" marL="0">
+            <a:pPr marL="0" indent="0">
               <a:lnSpc>
                 <a:spcPts val="1800"/>
               </a:lnSpc>
@@ -8543,7 +8503,7 @@
             <a:endParaRPr lang="en-US" sz="1000" dirty="0"/>
           </a:p>
           <a:p>
-            <a:pPr indent="0" marL="0">
+            <a:pPr marL="0" indent="0">
               <a:lnSpc>
                 <a:spcPts val="1800"/>
               </a:lnSpc>
@@ -8585,6 +8545,13 @@
           </a:solidFill>
           <a:ln/>
         </p:spPr>
+        <p:txBody>
+          <a:bodyPr/>
+          <a:lstStyle/>
+          <a:p>
+            <a:endParaRPr lang="en-US"/>
+          </a:p>
+        </p:txBody>
       </p:sp>
       <p:sp>
         <p:nvSpPr>
@@ -8607,7 +8574,7 @@
           <a:bodyPr wrap="square" rtlCol="0" anchor="ctr"/>
           <a:lstStyle/>
           <a:p>
-            <a:pPr indent="0" marL="0">
+            <a:pPr marL="0" indent="0">
               <a:buNone/>
             </a:pPr>
             <a:r>
@@ -8646,7 +8613,7 @@
           <a:bodyPr wrap="square" rtlCol="0" anchor="ctr"/>
           <a:lstStyle/>
           <a:p>
-            <a:pPr indent="0" marL="0">
+            <a:pPr marL="0" indent="0">
               <a:lnSpc>
                 <a:spcPts val="2000"/>
               </a:lnSpc>
@@ -8666,7 +8633,7 @@
             <a:endParaRPr lang="en-US" sz="1100" dirty="0"/>
           </a:p>
           <a:p>
-            <a:pPr indent="0" marL="0">
+            <a:pPr marL="0" indent="0">
               <a:lnSpc>
                 <a:spcPts val="2000"/>
               </a:lnSpc>
@@ -8686,7 +8653,7 @@
             <a:endParaRPr lang="en-US" sz="1100" dirty="0"/>
           </a:p>
           <a:p>
-            <a:pPr indent="0" marL="0">
+            <a:pPr marL="0" indent="0">
               <a:lnSpc>
                 <a:spcPts val="2000"/>
               </a:lnSpc>
@@ -8706,7 +8673,7 @@
             <a:endParaRPr lang="en-US" sz="1100" dirty="0"/>
           </a:p>
           <a:p>
-            <a:pPr indent="0" marL="0">
+            <a:pPr marL="0" indent="0">
               <a:lnSpc>
                 <a:spcPts val="2000"/>
               </a:lnSpc>
@@ -8753,6 +8720,13 @@
             <a:prstDash val="solid"/>
           </a:ln>
         </p:spPr>
+        <p:txBody>
+          <a:bodyPr/>
+          <a:lstStyle/>
+          <a:p>
+            <a:endParaRPr lang="en-US"/>
+          </a:p>
+        </p:txBody>
       </p:sp>
       <p:sp>
         <p:nvSpPr>
@@ -8775,7 +8749,7 @@
           <a:bodyPr wrap="square" rtlCol="0" anchor="ctr"/>
           <a:lstStyle/>
           <a:p>
-            <a:pPr indent="0" marL="0">
+            <a:pPr marL="0" indent="0">
               <a:buNone/>
             </a:pPr>
             <a:r>
@@ -8814,7 +8788,7 @@
           <a:bodyPr wrap="square" rtlCol="0" anchor="ctr"/>
           <a:lstStyle/>
           <a:p>
-            <a:pPr algn="ctr" indent="0" marL="0">
+            <a:pPr marL="0" indent="0" algn="ctr">
               <a:buNone/>
             </a:pPr>
             <a:r>
@@ -8876,6 +8850,13 @@
           </a:solidFill>
           <a:ln/>
         </p:spPr>
+        <p:txBody>
+          <a:bodyPr/>
+          <a:lstStyle/>
+          <a:p>
+            <a:endParaRPr lang="en-US"/>
+          </a:p>
+        </p:txBody>
       </p:sp>
       <p:sp>
         <p:nvSpPr>
@@ -8898,7 +8879,7 @@
           <a:bodyPr wrap="square" rtlCol="0" anchor="ctr"/>
           <a:lstStyle/>
           <a:p>
-            <a:pPr indent="0" marL="0">
+            <a:pPr marL="0" indent="0">
               <a:buNone/>
             </a:pPr>
             <a:r>
@@ -8937,7 +8918,7 @@
           <a:bodyPr wrap="square" rtlCol="0" anchor="ctr"/>
           <a:lstStyle/>
           <a:p>
-            <a:pPr indent="0" marL="0">
+            <a:pPr marL="0" indent="0">
               <a:buNone/>
             </a:pPr>
             <a:r>
@@ -8978,6 +8959,13 @@
           </a:solidFill>
           <a:ln/>
         </p:spPr>
+        <p:txBody>
+          <a:bodyPr/>
+          <a:lstStyle/>
+          <a:p>
+            <a:endParaRPr lang="en-US"/>
+          </a:p>
+        </p:txBody>
       </p:sp>
       <p:sp>
         <p:nvSpPr>
@@ -9000,7 +8988,7 @@
           <a:bodyPr wrap="square" rtlCol="0" anchor="ctr"/>
           <a:lstStyle/>
           <a:p>
-            <a:pPr algn="ctr" indent="0" marL="0">
+            <a:pPr marL="0" indent="0" algn="ctr">
               <a:buNone/>
             </a:pPr>
             <a:r>
@@ -9039,7 +9027,7 @@
           <a:bodyPr wrap="square" rtlCol="0" anchor="ctr"/>
           <a:lstStyle/>
           <a:p>
-            <a:pPr algn="ctr" indent="0" marL="0">
+            <a:pPr marL="0" indent="0" algn="ctr">
               <a:buNone/>
             </a:pPr>
             <a:r>
@@ -9078,6 +9066,13 @@
           </a:solidFill>
           <a:ln/>
         </p:spPr>
+        <p:txBody>
+          <a:bodyPr/>
+          <a:lstStyle/>
+          <a:p>
+            <a:endParaRPr lang="en-US"/>
+          </a:p>
+        </p:txBody>
       </p:sp>
       <p:sp>
         <p:nvSpPr>
@@ -9100,7 +9095,7 @@
           <a:bodyPr wrap="square" rtlCol="0" anchor="ctr"/>
           <a:lstStyle/>
           <a:p>
-            <a:pPr algn="ctr" indent="0" marL="0">
+            <a:pPr marL="0" indent="0" algn="ctr">
               <a:buNone/>
             </a:pPr>
             <a:r>
@@ -9139,7 +9134,7 @@
           <a:bodyPr wrap="square" rtlCol="0" anchor="ctr"/>
           <a:lstStyle/>
           <a:p>
-            <a:pPr indent="0" marL="0">
+            <a:pPr marL="0" indent="0">
               <a:buNone/>
             </a:pPr>
             <a:r>
@@ -9178,7 +9173,7 @@
           <a:bodyPr wrap="square" rtlCol="0" anchor="t"/>
           <a:lstStyle/>
           <a:p>
-            <a:pPr indent="0" marL="0">
+            <a:pPr marL="0" indent="0">
               <a:lnSpc>
                 <a:spcPts val="1600"/>
               </a:lnSpc>
@@ -9220,6 +9215,13 @@
           </a:solidFill>
           <a:ln/>
         </p:spPr>
+        <p:txBody>
+          <a:bodyPr/>
+          <a:lstStyle/>
+          <a:p>
+            <a:endParaRPr lang="en-US"/>
+          </a:p>
+        </p:txBody>
       </p:sp>
       <p:sp>
         <p:nvSpPr>
@@ -9242,7 +9244,7 @@
           <a:bodyPr wrap="square" rtlCol="0" anchor="ctr"/>
           <a:lstStyle/>
           <a:p>
-            <a:pPr algn="ctr" indent="0" marL="0">
+            <a:pPr marL="0" indent="0" algn="ctr">
               <a:buNone/>
             </a:pPr>
             <a:r>
@@ -9281,7 +9283,7 @@
           <a:bodyPr wrap="square" rtlCol="0" anchor="ctr"/>
           <a:lstStyle/>
           <a:p>
-            <a:pPr indent="0" marL="0">
+            <a:pPr marL="0" indent="0">
               <a:buNone/>
             </a:pPr>
             <a:r>
@@ -9320,7 +9322,7 @@
           <a:bodyPr wrap="square" rtlCol="0" anchor="t"/>
           <a:lstStyle/>
           <a:p>
-            <a:pPr indent="0" marL="0">
+            <a:pPr marL="0" indent="0">
               <a:lnSpc>
                 <a:spcPts val="1600"/>
               </a:lnSpc>
@@ -9362,6 +9364,13 @@
           </a:solidFill>
           <a:ln/>
         </p:spPr>
+        <p:txBody>
+          <a:bodyPr/>
+          <a:lstStyle/>
+          <a:p>
+            <a:endParaRPr lang="en-US"/>
+          </a:p>
+        </p:txBody>
       </p:sp>
       <p:sp>
         <p:nvSpPr>
@@ -9384,7 +9393,7 @@
           <a:bodyPr wrap="square" rtlCol="0" anchor="ctr"/>
           <a:lstStyle/>
           <a:p>
-            <a:pPr algn="ctr" indent="0" marL="0">
+            <a:pPr marL="0" indent="0" algn="ctr">
               <a:buNone/>
             </a:pPr>
             <a:r>
@@ -9423,7 +9432,7 @@
           <a:bodyPr wrap="square" rtlCol="0" anchor="ctr"/>
           <a:lstStyle/>
           <a:p>
-            <a:pPr indent="0" marL="0">
+            <a:pPr marL="0" indent="0">
               <a:buNone/>
             </a:pPr>
             <a:r>
@@ -9462,7 +9471,7 @@
           <a:bodyPr wrap="square" rtlCol="0" anchor="t"/>
           <a:lstStyle/>
           <a:p>
-            <a:pPr indent="0" marL="0">
+            <a:pPr marL="0" indent="0">
               <a:lnSpc>
                 <a:spcPts val="1600"/>
               </a:lnSpc>
@@ -9504,6 +9513,13 @@
           </a:solidFill>
           <a:ln/>
         </p:spPr>
+        <p:txBody>
+          <a:bodyPr/>
+          <a:lstStyle/>
+          <a:p>
+            <a:endParaRPr lang="en-US"/>
+          </a:p>
+        </p:txBody>
       </p:sp>
       <p:sp>
         <p:nvSpPr>
@@ -9526,7 +9542,7 @@
           <a:bodyPr wrap="square" rtlCol="0" anchor="ctr"/>
           <a:lstStyle/>
           <a:p>
-            <a:pPr algn="ctr" indent="0" marL="0">
+            <a:pPr marL="0" indent="0" algn="ctr">
               <a:buNone/>
             </a:pPr>
             <a:r>
@@ -9565,7 +9581,7 @@
           <a:bodyPr wrap="square" rtlCol="0" anchor="ctr"/>
           <a:lstStyle/>
           <a:p>
-            <a:pPr indent="0" marL="0">
+            <a:pPr marL="0" indent="0">
               <a:buNone/>
             </a:pPr>
             <a:r>
@@ -9604,7 +9620,7 @@
           <a:bodyPr wrap="square" rtlCol="0" anchor="t"/>
           <a:lstStyle/>
           <a:p>
-            <a:pPr indent="0" marL="0">
+            <a:pPr marL="0" indent="0">
               <a:lnSpc>
                 <a:spcPts val="1600"/>
               </a:lnSpc>
@@ -9646,6 +9662,13 @@
           </a:solidFill>
           <a:ln/>
         </p:spPr>
+        <p:txBody>
+          <a:bodyPr/>
+          <a:lstStyle/>
+          <a:p>
+            <a:endParaRPr lang="en-US"/>
+          </a:p>
+        </p:txBody>
       </p:sp>
       <p:sp>
         <p:nvSpPr>
@@ -9668,7 +9691,7 @@
           <a:bodyPr wrap="square" rtlCol="0" anchor="ctr"/>
           <a:lstStyle/>
           <a:p>
-            <a:pPr algn="ctr" indent="0" marL="0">
+            <a:pPr marL="0" indent="0" algn="ctr">
               <a:buNone/>
             </a:pPr>
             <a:r>
@@ -9707,7 +9730,7 @@
           <a:bodyPr wrap="square" rtlCol="0" anchor="ctr"/>
           <a:lstStyle/>
           <a:p>
-            <a:pPr indent="0" marL="0">
+            <a:pPr marL="0" indent="0">
               <a:buNone/>
             </a:pPr>
             <a:r>
@@ -9746,7 +9769,7 @@
           <a:bodyPr wrap="square" rtlCol="0" anchor="t"/>
           <a:lstStyle/>
           <a:p>
-            <a:pPr indent="0" marL="0">
+            <a:pPr marL="0" indent="0">
               <a:lnSpc>
                 <a:spcPts val="1600"/>
               </a:lnSpc>
@@ -9788,6 +9811,13 @@
           </a:solidFill>
           <a:ln/>
         </p:spPr>
+        <p:txBody>
+          <a:bodyPr/>
+          <a:lstStyle/>
+          <a:p>
+            <a:endParaRPr lang="en-US"/>
+          </a:p>
+        </p:txBody>
       </p:sp>
       <p:sp>
         <p:nvSpPr>
@@ -9810,7 +9840,7 @@
           <a:bodyPr wrap="square" rtlCol="0" anchor="ctr"/>
           <a:lstStyle/>
           <a:p>
-            <a:pPr algn="ctr" indent="0" marL="0">
+            <a:pPr marL="0" indent="0" algn="ctr">
               <a:buNone/>
             </a:pPr>
             <a:r>
@@ -9849,7 +9879,7 @@
           <a:bodyPr wrap="square" rtlCol="0" anchor="ctr"/>
           <a:lstStyle/>
           <a:p>
-            <a:pPr indent="0" marL="0">
+            <a:pPr marL="0" indent="0">
               <a:buNone/>
             </a:pPr>
             <a:r>
@@ -9888,7 +9918,7 @@
           <a:bodyPr wrap="square" rtlCol="0" anchor="t"/>
           <a:lstStyle/>
           <a:p>
-            <a:pPr indent="0" marL="0">
+            <a:pPr marL="0" indent="0">
               <a:lnSpc>
                 <a:spcPts val="1600"/>
               </a:lnSpc>
@@ -9930,6 +9960,13 @@
           </a:solidFill>
           <a:ln/>
         </p:spPr>
+        <p:txBody>
+          <a:bodyPr/>
+          <a:lstStyle/>
+          <a:p>
+            <a:endParaRPr lang="en-US"/>
+          </a:p>
+        </p:txBody>
       </p:sp>
       <p:sp>
         <p:nvSpPr>
@@ -9952,7 +9989,7 @@
           <a:bodyPr wrap="square" rtlCol="0" anchor="ctr"/>
           <a:lstStyle/>
           <a:p>
-            <a:pPr algn="ctr" indent="0" marL="0">
+            <a:pPr marL="0" indent="0" algn="ctr">
               <a:buNone/>
             </a:pPr>
             <a:r>
@@ -9991,7 +10028,7 @@
           <a:bodyPr wrap="square" rtlCol="0" anchor="ctr"/>
           <a:lstStyle/>
           <a:p>
-            <a:pPr indent="0" marL="0">
+            <a:pPr marL="0" indent="0">
               <a:buNone/>
             </a:pPr>
             <a:r>
@@ -10030,7 +10067,7 @@
           <a:bodyPr wrap="square" rtlCol="0" anchor="t"/>
           <a:lstStyle/>
           <a:p>
-            <a:pPr indent="0" marL="0">
+            <a:pPr marL="0" indent="0">
               <a:lnSpc>
                 <a:spcPts val="1600"/>
               </a:lnSpc>
@@ -10077,6 +10114,13 @@
             <a:prstDash val="solid"/>
           </a:ln>
         </p:spPr>
+        <p:txBody>
+          <a:bodyPr/>
+          <a:lstStyle/>
+          <a:p>
+            <a:endParaRPr lang="en-US"/>
+          </a:p>
+        </p:txBody>
       </p:sp>
       <p:sp>
         <p:nvSpPr>
@@ -10099,7 +10143,7 @@
           <a:bodyPr wrap="square" rtlCol="0" anchor="ctr"/>
           <a:lstStyle/>
           <a:p>
-            <a:pPr indent="0" marL="0">
+            <a:pPr marL="0" indent="0">
               <a:buNone/>
             </a:pPr>
             <a:r>
@@ -10138,7 +10182,7 @@
           <a:bodyPr wrap="square" rtlCol="0" anchor="ctr"/>
           <a:lstStyle/>
           <a:p>
-            <a:pPr algn="ctr" indent="0" marL="0">
+            <a:pPr marL="0" indent="0" algn="ctr">
               <a:buNone/>
             </a:pPr>
             <a:r>
@@ -10200,6 +10244,13 @@
           </a:solidFill>
           <a:ln/>
         </p:spPr>
+        <p:txBody>
+          <a:bodyPr/>
+          <a:lstStyle/>
+          <a:p>
+            <a:endParaRPr lang="en-US"/>
+          </a:p>
+        </p:txBody>
       </p:sp>
       <p:sp>
         <p:nvSpPr>
@@ -10222,7 +10273,7 @@
           <a:bodyPr wrap="square" rtlCol="0" anchor="ctr"/>
           <a:lstStyle/>
           <a:p>
-            <a:pPr indent="0" marL="0">
+            <a:pPr marL="0" indent="0">
               <a:buNone/>
             </a:pPr>
             <a:r>
@@ -10261,7 +10312,7 @@
           <a:bodyPr wrap="square" rtlCol="0" anchor="ctr"/>
           <a:lstStyle/>
           <a:p>
-            <a:pPr indent="0" marL="0">
+            <a:pPr marL="0" indent="0">
               <a:buNone/>
             </a:pPr>
             <a:r>
@@ -10302,6 +10353,13 @@
           </a:solidFill>
           <a:ln/>
         </p:spPr>
+        <p:txBody>
+          <a:bodyPr/>
+          <a:lstStyle/>
+          <a:p>
+            <a:endParaRPr lang="en-US"/>
+          </a:p>
+        </p:txBody>
       </p:sp>
       <p:sp>
         <p:nvSpPr>
@@ -10324,7 +10382,7 @@
           <a:bodyPr wrap="square" rtlCol="0" anchor="ctr"/>
           <a:lstStyle/>
           <a:p>
-            <a:pPr algn="ctr" indent="0" marL="0">
+            <a:pPr marL="0" indent="0" algn="ctr">
               <a:buNone/>
             </a:pPr>
             <a:r>
@@ -10363,7 +10421,7 @@
           <a:bodyPr wrap="square" rtlCol="0" anchor="ctr"/>
           <a:lstStyle/>
           <a:p>
-            <a:pPr algn="ctr" indent="0" marL="0">
+            <a:pPr marL="0" indent="0" algn="ctr">
               <a:buNone/>
             </a:pPr>
             <a:r>
@@ -10402,6 +10460,13 @@
           </a:solidFill>
           <a:ln/>
         </p:spPr>
+        <p:txBody>
+          <a:bodyPr/>
+          <a:lstStyle/>
+          <a:p>
+            <a:endParaRPr lang="en-US"/>
+          </a:p>
+        </p:txBody>
       </p:sp>
       <p:sp>
         <p:nvSpPr>
@@ -10424,7 +10489,7 @@
           <a:bodyPr wrap="square" rtlCol="0" anchor="ctr"/>
           <a:lstStyle/>
           <a:p>
-            <a:pPr indent="0" marL="0">
+            <a:pPr marL="0" indent="0">
               <a:buNone/>
             </a:pPr>
             <a:r>
@@ -10463,7 +10528,7 @@
           <a:bodyPr wrap="square" rtlCol="0" anchor="ctr"/>
           <a:lstStyle/>
           <a:p>
-            <a:pPr indent="0" marL="0">
+            <a:pPr marL="0" indent="0">
               <a:lnSpc>
                 <a:spcPts val="2000"/>
               </a:lnSpc>
@@ -10480,12 +10545,6 @@
               </a:rPr>
               <a:t>Setup: </a:t>
             </a:r>
-            <a:pPr indent="0" marL="0">
-              <a:lnSpc>
-                <a:spcPts val="2000"/>
-              </a:lnSpc>
-              <a:buNone/>
-            </a:pPr>
             <a:r>
               <a:rPr lang="en-US" sz="1050" dirty="0">
                 <a:solidFill>
@@ -10498,12 +10557,6 @@
               <a:t>Prepare 4-5 persona cards with discovery details pre-filled. Each agent draws one, has 60 seconds to deliver a pitch.
 </a:t>
             </a:r>
-            <a:pPr indent="0" marL="0">
-              <a:lnSpc>
-                <a:spcPts val="2000"/>
-              </a:lnSpc>
-              <a:buNone/>
-            </a:pPr>
             <a:r>
               <a:rPr lang="en-US" sz="1050" b="1" dirty="0">
                 <a:solidFill>
@@ -10515,12 +10568,6 @@
               </a:rPr>
               <a:t>Rules: </a:t>
             </a:r>
-            <a:pPr indent="0" marL="0">
-              <a:lnSpc>
-                <a:spcPts val="2000"/>
-              </a:lnSpc>
-              <a:buNone/>
-            </a:pPr>
             <a:r>
               <a:rPr lang="en-US" sz="1050" dirty="0">
                 <a:solidFill>
@@ -10533,12 +10580,6 @@
               <a:t>Must include "Based on what you told me..." and at least one "I heard you say..." Must reference broadband labels.
 </a:t>
             </a:r>
-            <a:pPr indent="0" marL="0">
-              <a:lnSpc>
-                <a:spcPts val="2000"/>
-              </a:lnSpc>
-              <a:buNone/>
-            </a:pPr>
             <a:r>
               <a:rPr lang="en-US" sz="1050" b="1" dirty="0">
                 <a:solidFill>
@@ -10550,12 +10591,6 @@
               </a:rPr>
               <a:t>Judging: </a:t>
             </a:r>
-            <a:pPr indent="0" marL="0">
-              <a:lnSpc>
-                <a:spcPts val="2000"/>
-              </a:lnSpc>
-              <a:buNone/>
-            </a:pPr>
             <a:r>
               <a:rPr lang="en-US" sz="1050" dirty="0">
                 <a:solidFill>
@@ -10592,6 +10627,13 @@
           </a:solidFill>
           <a:ln/>
         </p:spPr>
+        <p:txBody>
+          <a:bodyPr/>
+          <a:lstStyle/>
+          <a:p>
+            <a:endParaRPr lang="en-US"/>
+          </a:p>
+        </p:txBody>
       </p:sp>
       <p:sp>
         <p:nvSpPr>
@@ -10614,7 +10656,7 @@
           <a:bodyPr wrap="square" rtlCol="0" anchor="ctr"/>
           <a:lstStyle/>
           <a:p>
-            <a:pPr indent="0" marL="0">
+            <a:pPr marL="0" indent="0">
               <a:buNone/>
             </a:pPr>
             <a:r>
@@ -10653,7 +10695,7 @@
           <a:bodyPr wrap="square" rtlCol="0" anchor="ctr"/>
           <a:lstStyle/>
           <a:p>
-            <a:pPr indent="0" marL="0">
+            <a:pPr marL="0" indent="0">
               <a:lnSpc>
                 <a:spcPts val="2000"/>
               </a:lnSpc>
@@ -10673,7 +10715,7 @@
             <a:endParaRPr lang="en-US" sz="1050" dirty="0"/>
           </a:p>
           <a:p>
-            <a:pPr indent="0" marL="0">
+            <a:pPr marL="0" indent="0">
               <a:lnSpc>
                 <a:spcPts val="2000"/>
               </a:lnSpc>
@@ -10693,7 +10735,7 @@
             <a:endParaRPr lang="en-US" sz="1050" dirty="0"/>
           </a:p>
           <a:p>
-            <a:pPr indent="0" marL="0">
+            <a:pPr marL="0" indent="0">
               <a:lnSpc>
                 <a:spcPts val="2000"/>
               </a:lnSpc>
@@ -10713,7 +10755,7 @@
             <a:endParaRPr lang="en-US" sz="1050" dirty="0"/>
           </a:p>
           <a:p>
-            <a:pPr indent="0" marL="0">
+            <a:pPr marL="0" indent="0">
               <a:lnSpc>
                 <a:spcPts val="2000"/>
               </a:lnSpc>
@@ -10755,6 +10797,13 @@
           </a:solidFill>
           <a:ln/>
         </p:spPr>
+        <p:txBody>
+          <a:bodyPr/>
+          <a:lstStyle/>
+          <a:p>
+            <a:endParaRPr lang="en-US"/>
+          </a:p>
+        </p:txBody>
       </p:sp>
       <p:sp>
         <p:nvSpPr>
@@ -10777,7 +10826,7 @@
           <a:bodyPr wrap="square" rtlCol="0" anchor="ctr"/>
           <a:lstStyle/>
           <a:p>
-            <a:pPr indent="0" marL="0">
+            <a:pPr marL="0" indent="0">
               <a:buNone/>
             </a:pPr>
             <a:r>
@@ -10816,7 +10865,7 @@
           <a:bodyPr wrap="square" rtlCol="0" anchor="ctr"/>
           <a:lstStyle/>
           <a:p>
-            <a:pPr indent="0" marL="0">
+            <a:pPr marL="0" indent="0">
               <a:lnSpc>
                 <a:spcPts val="2000"/>
               </a:lnSpc>
@@ -10836,7 +10885,7 @@
             <a:endParaRPr lang="en-US" sz="1100" dirty="0"/>
           </a:p>
           <a:p>
-            <a:pPr indent="0" marL="0">
+            <a:pPr marL="0" indent="0">
               <a:lnSpc>
                 <a:spcPts val="2000"/>
               </a:lnSpc>
@@ -10856,7 +10905,7 @@
             <a:endParaRPr lang="en-US" sz="1100" dirty="0"/>
           </a:p>
           <a:p>
-            <a:pPr indent="0" marL="0">
+            <a:pPr marL="0" indent="0">
               <a:lnSpc>
                 <a:spcPts val="2000"/>
               </a:lnSpc>
@@ -10876,7 +10925,7 @@
             <a:endParaRPr lang="en-US" sz="1100" dirty="0"/>
           </a:p>
           <a:p>
-            <a:pPr indent="0" marL="0">
+            <a:pPr marL="0" indent="0">
               <a:lnSpc>
                 <a:spcPts val="2000"/>
               </a:lnSpc>
@@ -10923,6 +10972,13 @@
             <a:prstDash val="solid"/>
           </a:ln>
         </p:spPr>
+        <p:txBody>
+          <a:bodyPr/>
+          <a:lstStyle/>
+          <a:p>
+            <a:endParaRPr lang="en-US"/>
+          </a:p>
+        </p:txBody>
       </p:sp>
       <p:sp>
         <p:nvSpPr>
@@ -10945,7 +11001,7 @@
           <a:bodyPr wrap="square" rtlCol="0" anchor="ctr"/>
           <a:lstStyle/>
           <a:p>
-            <a:pPr indent="0" marL="0">
+            <a:pPr marL="0" indent="0">
               <a:buNone/>
             </a:pPr>
             <a:r>
@@ -10984,7 +11040,7 @@
           <a:bodyPr wrap="square" rtlCol="0" anchor="ctr"/>
           <a:lstStyle/>
           <a:p>
-            <a:pPr algn="ctr" indent="0" marL="0">
+            <a:pPr marL="0" indent="0" algn="ctr">
               <a:buNone/>
             </a:pPr>
             <a:r>
@@ -11042,10 +11098,17 @@
             <a:avLst/>
           </a:prstGeom>
           <a:solidFill>
-            <a:srgbClr val="DC2626"/>
+            <a:srgbClr val="E67E22"/>
           </a:solidFill>
           <a:ln/>
         </p:spPr>
+        <p:txBody>
+          <a:bodyPr/>
+          <a:lstStyle/>
+          <a:p>
+            <a:endParaRPr lang="en-US"/>
+          </a:p>
+        </p:txBody>
       </p:sp>
       <p:sp>
         <p:nvSpPr>
@@ -11068,7 +11131,7 @@
           <a:bodyPr wrap="square" rtlCol="0" anchor="ctr"/>
           <a:lstStyle/>
           <a:p>
-            <a:pPr indent="0" marL="0">
+            <a:pPr marL="0" indent="0">
               <a:buNone/>
             </a:pPr>
             <a:r>
@@ -11107,7 +11170,7 @@
           <a:bodyPr wrap="square" rtlCol="0" anchor="ctr"/>
           <a:lstStyle/>
           <a:p>
-            <a:pPr indent="0" marL="0">
+            <a:pPr marL="0" indent="0">
               <a:buNone/>
             </a:pPr>
             <a:r>
@@ -11148,6 +11211,13 @@
           </a:solidFill>
           <a:ln/>
         </p:spPr>
+        <p:txBody>
+          <a:bodyPr/>
+          <a:lstStyle/>
+          <a:p>
+            <a:endParaRPr lang="en-US"/>
+          </a:p>
+        </p:txBody>
       </p:sp>
       <p:sp>
         <p:nvSpPr>
@@ -11170,7 +11240,7 @@
           <a:bodyPr wrap="square" rtlCol="0" anchor="ctr"/>
           <a:lstStyle/>
           <a:p>
-            <a:pPr algn="ctr" indent="0" marL="0">
+            <a:pPr marL="0" indent="0" algn="ctr">
               <a:buNone/>
             </a:pPr>
             <a:r>
@@ -11209,7 +11279,7 @@
           <a:bodyPr wrap="square" rtlCol="0" anchor="ctr"/>
           <a:lstStyle/>
           <a:p>
-            <a:pPr algn="ctr" indent="0" marL="0">
+            <a:pPr marL="0" indent="0" algn="ctr">
               <a:buNone/>
             </a:pPr>
             <a:r>
@@ -11244,10 +11314,17 @@
             </a:avLst>
           </a:prstGeom>
           <a:solidFill>
-            <a:srgbClr val="FEF2F2"/>
+            <a:srgbClr val="FFF7ED"/>
           </a:solidFill>
           <a:ln/>
         </p:spPr>
+        <p:txBody>
+          <a:bodyPr/>
+          <a:lstStyle/>
+          <a:p>
+            <a:endParaRPr lang="en-US"/>
+          </a:p>
+        </p:txBody>
       </p:sp>
       <p:sp>
         <p:nvSpPr>
@@ -11270,13 +11347,13 @@
           <a:bodyPr wrap="square" rtlCol="0" anchor="ctr"/>
           <a:lstStyle/>
           <a:p>
-            <a:pPr algn="ctr" indent="0" marL="0">
+            <a:pPr marL="0" indent="0" algn="ctr">
               <a:buNone/>
             </a:pPr>
             <a:r>
               <a:rPr lang="en-US" sz="1400" b="1" dirty="0">
                 <a:solidFill>
-                  <a:srgbClr val="DC2626"/>
+                  <a:srgbClr val="E67E22"/>
                 </a:solidFill>
                 <a:latin typeface="Segoe UI" pitchFamily="34" charset="0"/>
                 <a:ea typeface="Segoe UI" pitchFamily="34" charset="-122"/>
@@ -11309,7 +11386,7 @@
           <a:bodyPr wrap="square" rtlCol="0" anchor="ctr"/>
           <a:lstStyle/>
           <a:p>
-            <a:pPr indent="0" marL="0">
+            <a:pPr marL="0" indent="0">
               <a:buNone/>
             </a:pPr>
             <a:r>
@@ -11348,7 +11425,7 @@
           <a:bodyPr wrap="square" rtlCol="0" anchor="t"/>
           <a:lstStyle/>
           <a:p>
-            <a:pPr indent="0" marL="0">
+            <a:pPr marL="0" indent="0">
               <a:lnSpc>
                 <a:spcPts val="1600"/>
               </a:lnSpc>
@@ -11386,10 +11463,17 @@
             </a:avLst>
           </a:prstGeom>
           <a:solidFill>
-            <a:srgbClr val="FEF2F2"/>
+            <a:srgbClr val="FFF7ED"/>
           </a:solidFill>
           <a:ln/>
         </p:spPr>
+        <p:txBody>
+          <a:bodyPr/>
+          <a:lstStyle/>
+          <a:p>
+            <a:endParaRPr lang="en-US"/>
+          </a:p>
+        </p:txBody>
       </p:sp>
       <p:sp>
         <p:nvSpPr>
@@ -11412,13 +11496,13 @@
           <a:bodyPr wrap="square" rtlCol="0" anchor="ctr"/>
           <a:lstStyle/>
           <a:p>
-            <a:pPr algn="ctr" indent="0" marL="0">
+            <a:pPr marL="0" indent="0" algn="ctr">
               <a:buNone/>
             </a:pPr>
             <a:r>
               <a:rPr lang="en-US" sz="1400" b="1" dirty="0">
                 <a:solidFill>
-                  <a:srgbClr val="DC2626"/>
+                  <a:srgbClr val="E67E22"/>
                 </a:solidFill>
                 <a:latin typeface="Segoe UI" pitchFamily="34" charset="0"/>
                 <a:ea typeface="Segoe UI" pitchFamily="34" charset="-122"/>
@@ -11451,7 +11535,7 @@
           <a:bodyPr wrap="square" rtlCol="0" anchor="ctr"/>
           <a:lstStyle/>
           <a:p>
-            <a:pPr indent="0" marL="0">
+            <a:pPr marL="0" indent="0">
               <a:buNone/>
             </a:pPr>
             <a:r>
@@ -11490,7 +11574,7 @@
           <a:bodyPr wrap="square" rtlCol="0" anchor="t"/>
           <a:lstStyle/>
           <a:p>
-            <a:pPr indent="0" marL="0">
+            <a:pPr marL="0" indent="0">
               <a:lnSpc>
                 <a:spcPts val="1600"/>
               </a:lnSpc>
@@ -11528,10 +11612,17 @@
             </a:avLst>
           </a:prstGeom>
           <a:solidFill>
-            <a:srgbClr val="FEF2F2"/>
+            <a:srgbClr val="FFF7ED"/>
           </a:solidFill>
           <a:ln/>
         </p:spPr>
+        <p:txBody>
+          <a:bodyPr/>
+          <a:lstStyle/>
+          <a:p>
+            <a:endParaRPr lang="en-US"/>
+          </a:p>
+        </p:txBody>
       </p:sp>
       <p:sp>
         <p:nvSpPr>
@@ -11554,13 +11645,13 @@
           <a:bodyPr wrap="square" rtlCol="0" anchor="ctr"/>
           <a:lstStyle/>
           <a:p>
-            <a:pPr algn="ctr" indent="0" marL="0">
+            <a:pPr marL="0" indent="0" algn="ctr">
               <a:buNone/>
             </a:pPr>
             <a:r>
               <a:rPr lang="en-US" sz="1400" b="1" dirty="0">
                 <a:solidFill>
-                  <a:srgbClr val="DC2626"/>
+                  <a:srgbClr val="E67E22"/>
                 </a:solidFill>
                 <a:latin typeface="Segoe UI" pitchFamily="34" charset="0"/>
                 <a:ea typeface="Segoe UI" pitchFamily="34" charset="-122"/>
@@ -11593,7 +11684,7 @@
           <a:bodyPr wrap="square" rtlCol="0" anchor="ctr"/>
           <a:lstStyle/>
           <a:p>
-            <a:pPr indent="0" marL="0">
+            <a:pPr marL="0" indent="0">
               <a:buNone/>
             </a:pPr>
             <a:r>
@@ -11632,7 +11723,7 @@
           <a:bodyPr wrap="square" rtlCol="0" anchor="t"/>
           <a:lstStyle/>
           <a:p>
-            <a:pPr indent="0" marL="0">
+            <a:pPr marL="0" indent="0">
               <a:lnSpc>
                 <a:spcPts val="1600"/>
               </a:lnSpc>
@@ -11652,7 +11743,7 @@
             <a:endParaRPr lang="en-US" sz="1000" dirty="0"/>
           </a:p>
           <a:p>
-            <a:pPr indent="0" marL="0">
+            <a:pPr marL="0" indent="0">
               <a:lnSpc>
                 <a:spcPts val="1600"/>
               </a:lnSpc>
@@ -11690,10 +11781,17 @@
             </a:avLst>
           </a:prstGeom>
           <a:solidFill>
-            <a:srgbClr val="FEF2F2"/>
+            <a:srgbClr val="FFF7ED"/>
           </a:solidFill>
           <a:ln/>
         </p:spPr>
+        <p:txBody>
+          <a:bodyPr/>
+          <a:lstStyle/>
+          <a:p>
+            <a:endParaRPr lang="en-US"/>
+          </a:p>
+        </p:txBody>
       </p:sp>
       <p:sp>
         <p:nvSpPr>
@@ -11716,13 +11814,13 @@
           <a:bodyPr wrap="square" rtlCol="0" anchor="ctr"/>
           <a:lstStyle/>
           <a:p>
-            <a:pPr algn="ctr" indent="0" marL="0">
+            <a:pPr marL="0" indent="0" algn="ctr">
               <a:buNone/>
             </a:pPr>
             <a:r>
               <a:rPr lang="en-US" sz="1400" b="1" dirty="0">
                 <a:solidFill>
-                  <a:srgbClr val="DC2626"/>
+                  <a:srgbClr val="E67E22"/>
                 </a:solidFill>
                 <a:latin typeface="Segoe UI" pitchFamily="34" charset="0"/>
                 <a:ea typeface="Segoe UI" pitchFamily="34" charset="-122"/>
@@ -11755,7 +11853,7 @@
           <a:bodyPr wrap="square" rtlCol="0" anchor="ctr"/>
           <a:lstStyle/>
           <a:p>
-            <a:pPr indent="0" marL="0">
+            <a:pPr marL="0" indent="0">
               <a:buNone/>
             </a:pPr>
             <a:r>
@@ -11794,7 +11892,7 @@
           <a:bodyPr wrap="square" rtlCol="0" anchor="t"/>
           <a:lstStyle/>
           <a:p>
-            <a:pPr indent="0" marL="0">
+            <a:pPr marL="0" indent="0">
               <a:lnSpc>
                 <a:spcPts val="1600"/>
               </a:lnSpc>
@@ -11832,10 +11930,17 @@
             </a:avLst>
           </a:prstGeom>
           <a:solidFill>
-            <a:srgbClr val="FEF2F2"/>
+            <a:srgbClr val="FFF7ED"/>
           </a:solidFill>
           <a:ln/>
         </p:spPr>
+        <p:txBody>
+          <a:bodyPr/>
+          <a:lstStyle/>
+          <a:p>
+            <a:endParaRPr lang="en-US"/>
+          </a:p>
+        </p:txBody>
       </p:sp>
       <p:sp>
         <p:nvSpPr>
@@ -11858,13 +11963,13 @@
           <a:bodyPr wrap="square" rtlCol="0" anchor="ctr"/>
           <a:lstStyle/>
           <a:p>
-            <a:pPr algn="ctr" indent="0" marL="0">
+            <a:pPr marL="0" indent="0" algn="ctr">
               <a:buNone/>
             </a:pPr>
             <a:r>
               <a:rPr lang="en-US" sz="1400" b="1" dirty="0">
                 <a:solidFill>
-                  <a:srgbClr val="DC2626"/>
+                  <a:srgbClr val="E67E22"/>
                 </a:solidFill>
                 <a:latin typeface="Segoe UI" pitchFamily="34" charset="0"/>
                 <a:ea typeface="Segoe UI" pitchFamily="34" charset="-122"/>
@@ -11897,7 +12002,7 @@
           <a:bodyPr wrap="square" rtlCol="0" anchor="ctr"/>
           <a:lstStyle/>
           <a:p>
-            <a:pPr indent="0" marL="0">
+            <a:pPr marL="0" indent="0">
               <a:buNone/>
             </a:pPr>
             <a:r>
@@ -11936,7 +12041,7 @@
           <a:bodyPr wrap="square" rtlCol="0" anchor="t"/>
           <a:lstStyle/>
           <a:p>
-            <a:pPr indent="0" marL="0">
+            <a:pPr marL="0" indent="0">
               <a:lnSpc>
                 <a:spcPts val="1600"/>
               </a:lnSpc>
@@ -11974,10 +12079,17 @@
             </a:avLst>
           </a:prstGeom>
           <a:solidFill>
-            <a:srgbClr val="FEF2F2"/>
+            <a:srgbClr val="FFF7ED"/>
           </a:solidFill>
           <a:ln/>
         </p:spPr>
+        <p:txBody>
+          <a:bodyPr/>
+          <a:lstStyle/>
+          <a:p>
+            <a:endParaRPr lang="en-US"/>
+          </a:p>
+        </p:txBody>
       </p:sp>
       <p:sp>
         <p:nvSpPr>
@@ -12000,13 +12112,13 @@
           <a:bodyPr wrap="square" rtlCol="0" anchor="ctr"/>
           <a:lstStyle/>
           <a:p>
-            <a:pPr algn="ctr" indent="0" marL="0">
+            <a:pPr marL="0" indent="0" algn="ctr">
               <a:buNone/>
             </a:pPr>
             <a:r>
               <a:rPr lang="en-US" sz="1400" b="1" dirty="0">
                 <a:solidFill>
-                  <a:srgbClr val="DC2626"/>
+                  <a:srgbClr val="E67E22"/>
                 </a:solidFill>
                 <a:latin typeface="Segoe UI" pitchFamily="34" charset="0"/>
                 <a:ea typeface="Segoe UI" pitchFamily="34" charset="-122"/>
@@ -12039,7 +12151,7 @@
           <a:bodyPr wrap="square" rtlCol="0" anchor="ctr"/>
           <a:lstStyle/>
           <a:p>
-            <a:pPr indent="0" marL="0">
+            <a:pPr marL="0" indent="0">
               <a:buNone/>
             </a:pPr>
             <a:r>
@@ -12078,7 +12190,7 @@
           <a:bodyPr wrap="square" rtlCol="0" anchor="t"/>
           <a:lstStyle/>
           <a:p>
-            <a:pPr indent="0" marL="0">
+            <a:pPr marL="0" indent="0">
               <a:lnSpc>
                 <a:spcPts val="1600"/>
               </a:lnSpc>
@@ -12125,6 +12237,13 @@
             <a:prstDash val="solid"/>
           </a:ln>
         </p:spPr>
+        <p:txBody>
+          <a:bodyPr/>
+          <a:lstStyle/>
+          <a:p>
+            <a:endParaRPr lang="en-US"/>
+          </a:p>
+        </p:txBody>
       </p:sp>
       <p:sp>
         <p:nvSpPr>
@@ -12147,7 +12266,7 @@
           <a:bodyPr wrap="square" rtlCol="0" anchor="ctr"/>
           <a:lstStyle/>
           <a:p>
-            <a:pPr indent="0" marL="0">
+            <a:pPr marL="0" indent="0">
               <a:buNone/>
             </a:pPr>
             <a:r>
@@ -12186,7 +12305,7 @@
           <a:bodyPr wrap="square" rtlCol="0" anchor="ctr"/>
           <a:lstStyle/>
           <a:p>
-            <a:pPr algn="ctr" indent="0" marL="0">
+            <a:pPr marL="0" indent="0" algn="ctr">
               <a:buNone/>
             </a:pPr>
             <a:r>
@@ -12244,10 +12363,17 @@
             <a:avLst/>
           </a:prstGeom>
           <a:solidFill>
-            <a:srgbClr val="DC2626"/>
+            <a:srgbClr val="E67E22"/>
           </a:solidFill>
           <a:ln/>
         </p:spPr>
+        <p:txBody>
+          <a:bodyPr/>
+          <a:lstStyle/>
+          <a:p>
+            <a:endParaRPr lang="en-US"/>
+          </a:p>
+        </p:txBody>
       </p:sp>
       <p:sp>
         <p:nvSpPr>
@@ -12270,7 +12396,7 @@
           <a:bodyPr wrap="square" rtlCol="0" anchor="ctr"/>
           <a:lstStyle/>
           <a:p>
-            <a:pPr indent="0" marL="0">
+            <a:pPr marL="0" indent="0">
               <a:buNone/>
             </a:pPr>
             <a:r>
@@ -12309,7 +12435,7 @@
           <a:bodyPr wrap="square" rtlCol="0" anchor="ctr"/>
           <a:lstStyle/>
           <a:p>
-            <a:pPr indent="0" marL="0">
+            <a:pPr marL="0" indent="0">
               <a:buNone/>
             </a:pPr>
             <a:r>
@@ -12350,6 +12476,13 @@
           </a:solidFill>
           <a:ln/>
         </p:spPr>
+        <p:txBody>
+          <a:bodyPr/>
+          <a:lstStyle/>
+          <a:p>
+            <a:endParaRPr lang="en-US"/>
+          </a:p>
+        </p:txBody>
       </p:sp>
       <p:sp>
         <p:nvSpPr>
@@ -12372,7 +12505,7 @@
           <a:bodyPr wrap="square" rtlCol="0" anchor="ctr"/>
           <a:lstStyle/>
           <a:p>
-            <a:pPr algn="ctr" indent="0" marL="0">
+            <a:pPr marL="0" indent="0" algn="ctr">
               <a:buNone/>
             </a:pPr>
             <a:r>
@@ -12411,7 +12544,7 @@
           <a:bodyPr wrap="square" rtlCol="0" anchor="ctr"/>
           <a:lstStyle/>
           <a:p>
-            <a:pPr algn="ctr" indent="0" marL="0">
+            <a:pPr marL="0" indent="0" algn="ctr">
               <a:buNone/>
             </a:pPr>
             <a:r>
@@ -12446,10 +12579,17 @@
             </a:avLst>
           </a:prstGeom>
           <a:solidFill>
-            <a:srgbClr val="DC2626"/>
+            <a:srgbClr val="E67E22"/>
           </a:solidFill>
           <a:ln/>
         </p:spPr>
+        <p:txBody>
+          <a:bodyPr/>
+          <a:lstStyle/>
+          <a:p>
+            <a:endParaRPr lang="en-US"/>
+          </a:p>
+        </p:txBody>
       </p:sp>
       <p:sp>
         <p:nvSpPr>
@@ -12472,7 +12612,7 @@
           <a:bodyPr wrap="square" rtlCol="0" anchor="ctr"/>
           <a:lstStyle/>
           <a:p>
-            <a:pPr indent="0" marL="0">
+            <a:pPr marL="0" indent="0">
               <a:buNone/>
             </a:pPr>
             <a:r>
@@ -12511,7 +12651,7 @@
           <a:bodyPr wrap="square" rtlCol="0" anchor="ctr"/>
           <a:lstStyle/>
           <a:p>
-            <a:pPr indent="0" marL="0">
+            <a:pPr marL="0" indent="0">
               <a:lnSpc>
                 <a:spcPts val="2000"/>
               </a:lnSpc>
@@ -12528,12 +12668,6 @@
               </a:rPr>
               <a:t>Setup: </a:t>
             </a:r>
-            <a:pPr indent="0" marL="0">
-              <a:lnSpc>
-                <a:spcPts val="2000"/>
-              </a:lnSpc>
-              <a:buNone/>
-            </a:pPr>
             <a:r>
               <a:rPr lang="en-US" sz="1050" dirty="0">
                 <a:solidFill>
@@ -12546,12 +12680,6 @@
               <a:t>Prepare objection cards. Agent sits in hot seat. Facilitator draws a card and delivers objection.
 </a:t>
             </a:r>
-            <a:pPr indent="0" marL="0">
-              <a:lnSpc>
-                <a:spcPts val="2000"/>
-              </a:lnSpc>
-              <a:buNone/>
-            </a:pPr>
             <a:r>
               <a:rPr lang="en-US" sz="1050" b="1" dirty="0">
                 <a:solidFill>
@@ -12563,12 +12691,6 @@
               </a:rPr>
               <a:t>Rules: </a:t>
             </a:r>
-            <a:pPr indent="0" marL="0">
-              <a:lnSpc>
-                <a:spcPts val="2000"/>
-              </a:lnSpc>
-              <a:buNone/>
-            </a:pPr>
             <a:r>
               <a:rPr lang="en-US" sz="1050" dirty="0">
                 <a:solidFill>
@@ -12581,12 +12703,6 @@
               <a:t>Agent must walk through ALL 4 steps in order. Then re-close. "Customer" decides if they'd stay on the line.
 </a:t>
             </a:r>
-            <a:pPr indent="0" marL="0">
-              <a:lnSpc>
-                <a:spcPts val="2000"/>
-              </a:lnSpc>
-              <a:buNone/>
-            </a:pPr>
             <a:r>
               <a:rPr lang="en-US" sz="1050" b="1" dirty="0">
                 <a:solidFill>
@@ -12598,12 +12714,6 @@
               </a:rPr>
               <a:t>Watch for: </a:t>
             </a:r>
-            <a:pPr indent="0" marL="0">
-              <a:lnSpc>
-                <a:spcPts val="2000"/>
-              </a:lnSpc>
-              <a:buNone/>
-            </a:pPr>
             <a:r>
               <a:rPr lang="en-US" sz="1050" dirty="0">
                 <a:solidFill>
@@ -12640,6 +12750,13 @@
           </a:solidFill>
           <a:ln/>
         </p:spPr>
+        <p:txBody>
+          <a:bodyPr/>
+          <a:lstStyle/>
+          <a:p>
+            <a:endParaRPr lang="en-US"/>
+          </a:p>
+        </p:txBody>
       </p:sp>
       <p:sp>
         <p:nvSpPr>
@@ -12662,7 +12779,7 @@
           <a:bodyPr wrap="square" rtlCol="0" anchor="ctr"/>
           <a:lstStyle/>
           <a:p>
-            <a:pPr indent="0" marL="0">
+            <a:pPr marL="0" indent="0">
               <a:buNone/>
             </a:pPr>
             <a:r>
@@ -12701,7 +12818,7 @@
           <a:bodyPr wrap="square" rtlCol="0" anchor="ctr"/>
           <a:lstStyle/>
           <a:p>
-            <a:pPr indent="0" marL="0">
+            <a:pPr marL="0" indent="0">
               <a:lnSpc>
                 <a:spcPts val="2000"/>
               </a:lnSpc>
@@ -12721,7 +12838,7 @@
             <a:endParaRPr lang="en-US" sz="1050" dirty="0"/>
           </a:p>
           <a:p>
-            <a:pPr indent="0" marL="0">
+            <a:pPr marL="0" indent="0">
               <a:lnSpc>
                 <a:spcPts val="2000"/>
               </a:lnSpc>
@@ -12741,7 +12858,7 @@
             <a:endParaRPr lang="en-US" sz="1050" dirty="0"/>
           </a:p>
           <a:p>
-            <a:pPr indent="0" marL="0">
+            <a:pPr marL="0" indent="0">
               <a:lnSpc>
                 <a:spcPts val="2000"/>
               </a:lnSpc>
@@ -12761,7 +12878,7 @@
             <a:endParaRPr lang="en-US" sz="1050" dirty="0"/>
           </a:p>
           <a:p>
-            <a:pPr indent="0" marL="0">
+            <a:pPr marL="0" indent="0">
               <a:lnSpc>
                 <a:spcPts val="2000"/>
               </a:lnSpc>
@@ -12803,6 +12920,13 @@
           </a:solidFill>
           <a:ln/>
         </p:spPr>
+        <p:txBody>
+          <a:bodyPr/>
+          <a:lstStyle/>
+          <a:p>
+            <a:endParaRPr lang="en-US"/>
+          </a:p>
+        </p:txBody>
       </p:sp>
       <p:sp>
         <p:nvSpPr>
@@ -12825,7 +12949,7 @@
           <a:bodyPr wrap="square" rtlCol="0" anchor="ctr"/>
           <a:lstStyle/>
           <a:p>
-            <a:pPr indent="0" marL="0">
+            <a:pPr marL="0" indent="0">
               <a:buNone/>
             </a:pPr>
             <a:r>
@@ -12864,7 +12988,7 @@
           <a:bodyPr wrap="square" rtlCol="0" anchor="ctr"/>
           <a:lstStyle/>
           <a:p>
-            <a:pPr indent="0" marL="0">
+            <a:pPr marL="0" indent="0">
               <a:lnSpc>
                 <a:spcPts val="2000"/>
               </a:lnSpc>
@@ -12884,7 +13008,7 @@
             <a:endParaRPr lang="en-US" sz="1100" dirty="0"/>
           </a:p>
           <a:p>
-            <a:pPr indent="0" marL="0">
+            <a:pPr marL="0" indent="0">
               <a:lnSpc>
                 <a:spcPts val="2000"/>
               </a:lnSpc>
@@ -12904,7 +13028,7 @@
             <a:endParaRPr lang="en-US" sz="1100" dirty="0"/>
           </a:p>
           <a:p>
-            <a:pPr indent="0" marL="0">
+            <a:pPr marL="0" indent="0">
               <a:lnSpc>
                 <a:spcPts val="2000"/>
               </a:lnSpc>
@@ -12924,7 +13048,7 @@
             <a:endParaRPr lang="en-US" sz="1100" dirty="0"/>
           </a:p>
           <a:p>
-            <a:pPr indent="0" marL="0">
+            <a:pPr marL="0" indent="0">
               <a:lnSpc>
                 <a:spcPts val="2000"/>
               </a:lnSpc>
@@ -12971,6 +13095,13 @@
             <a:prstDash val="solid"/>
           </a:ln>
         </p:spPr>
+        <p:txBody>
+          <a:bodyPr/>
+          <a:lstStyle/>
+          <a:p>
+            <a:endParaRPr lang="en-US"/>
+          </a:p>
+        </p:txBody>
       </p:sp>
       <p:sp>
         <p:nvSpPr>
@@ -12993,7 +13124,7 @@
           <a:bodyPr wrap="square" rtlCol="0" anchor="ctr"/>
           <a:lstStyle/>
           <a:p>
-            <a:pPr indent="0" marL="0">
+            <a:pPr marL="0" indent="0">
               <a:buNone/>
             </a:pPr>
             <a:r>
@@ -13032,7 +13163,7 @@
           <a:bodyPr wrap="square" rtlCol="0" anchor="ctr"/>
           <a:lstStyle/>
           <a:p>
-            <a:pPr algn="ctr" indent="0" marL="0">
+            <a:pPr marL="0" indent="0" algn="ctr">
               <a:buNone/>
             </a:pPr>
             <a:r>
@@ -13351,4 +13482,319 @@
     </a:ext>
   </a:extLst>
 </a:theme>
+</file>
+
+<file path=ppt/theme/theme2.xml><?xml version="1.0" encoding="utf-8"?>
+<a:theme xmlns:a="http://schemas.openxmlformats.org/drawingml/2006/main" name="Office Theme">
+  <a:themeElements>
+    <a:clrScheme name="Office">
+      <a:dk1>
+        <a:sysClr val="windowText" lastClr="000000"/>
+      </a:dk1>
+      <a:lt1>
+        <a:sysClr val="window" lastClr="FFFFFF"/>
+      </a:lt1>
+      <a:dk2>
+        <a:srgbClr val="0E2841"/>
+      </a:dk2>
+      <a:lt2>
+        <a:srgbClr val="E8E8E8"/>
+      </a:lt2>
+      <a:accent1>
+        <a:srgbClr val="156082"/>
+      </a:accent1>
+      <a:accent2>
+        <a:srgbClr val="E97132"/>
+      </a:accent2>
+      <a:accent3>
+        <a:srgbClr val="196B24"/>
+      </a:accent3>
+      <a:accent4>
+        <a:srgbClr val="0F9ED5"/>
+      </a:accent4>
+      <a:accent5>
+        <a:srgbClr val="A02B93"/>
+      </a:accent5>
+      <a:accent6>
+        <a:srgbClr val="4EA72E"/>
+      </a:accent6>
+      <a:hlink>
+        <a:srgbClr val="467886"/>
+      </a:hlink>
+      <a:folHlink>
+        <a:srgbClr val="96607D"/>
+      </a:folHlink>
+    </a:clrScheme>
+    <a:fontScheme name="Office">
+      <a:majorFont>
+        <a:latin typeface="Aptos Display" panose="02110004020202020204"/>
+        <a:ea typeface=""/>
+        <a:cs typeface=""/>
+        <a:font script="Jpan" typeface="游ゴシック Light"/>
+        <a:font script="Hang" typeface="맑은 고딕"/>
+        <a:font script="Hans" typeface="等线 Light"/>
+        <a:font script="Hant" typeface="新細明體"/>
+        <a:font script="Arab" typeface="Times New Roman"/>
+        <a:font script="Hebr" typeface="Times New Roman"/>
+        <a:font script="Thai" typeface="Angsana New"/>
+        <a:font script="Ethi" typeface="Nyala"/>
+        <a:font script="Beng" typeface="Vrinda"/>
+        <a:font script="Gujr" typeface="Shruti"/>
+        <a:font script="Khmr" typeface="MoolBoran"/>
+        <a:font script="Knda" typeface="Tunga"/>
+        <a:font script="Guru" typeface="Raavi"/>
+        <a:font script="Cans" typeface="Euphemia"/>
+        <a:font script="Cher" typeface="Plantagenet Cherokee"/>
+        <a:font script="Yiii" typeface="Microsoft Yi Baiti"/>
+        <a:font script="Tibt" typeface="Microsoft Himalaya"/>
+        <a:font script="Thaa" typeface="MV Boli"/>
+        <a:font script="Deva" typeface="Mangal"/>
+        <a:font script="Telu" typeface="Gautami"/>
+        <a:font script="Taml" typeface="Latha"/>
+        <a:font script="Syrc" typeface="Estrangelo Edessa"/>
+        <a:font script="Orya" typeface="Kalinga"/>
+        <a:font script="Mlym" typeface="Kartika"/>
+        <a:font script="Laoo" typeface="DokChampa"/>
+        <a:font script="Sinh" typeface="Iskoola Pota"/>
+        <a:font script="Mong" typeface="Mongolian Baiti"/>
+        <a:font script="Viet" typeface="Times New Roman"/>
+        <a:font script="Uigh" typeface="Microsoft Uighur"/>
+        <a:font script="Geor" typeface="Sylfaen"/>
+        <a:font script="Armn" typeface="Arial"/>
+        <a:font script="Bugi" typeface="Leelawadee UI"/>
+        <a:font script="Bopo" typeface="Microsoft JhengHei"/>
+        <a:font script="Java" typeface="Javanese Text"/>
+        <a:font script="Lisu" typeface="Segoe UI"/>
+        <a:font script="Mymr" typeface="Myanmar Text"/>
+        <a:font script="Nkoo" typeface="Ebrima"/>
+        <a:font script="Olck" typeface="Nirmala UI"/>
+        <a:font script="Osma" typeface="Ebrima"/>
+        <a:font script="Phag" typeface="Phagspa"/>
+        <a:font script="Syrn" typeface="Estrangelo Edessa"/>
+        <a:font script="Syrj" typeface="Estrangelo Edessa"/>
+        <a:font script="Syre" typeface="Estrangelo Edessa"/>
+        <a:font script="Sora" typeface="Nirmala UI"/>
+        <a:font script="Tale" typeface="Microsoft Tai Le"/>
+        <a:font script="Talu" typeface="Microsoft New Tai Lue"/>
+        <a:font script="Tfng" typeface="Ebrima"/>
+      </a:majorFont>
+      <a:minorFont>
+        <a:latin typeface="Aptos" panose="02110004020202020204"/>
+        <a:ea typeface=""/>
+        <a:cs typeface=""/>
+        <a:font script="Jpan" typeface="游ゴシック"/>
+        <a:font script="Hang" typeface="맑은 고딕"/>
+        <a:font script="Hans" typeface="等线"/>
+        <a:font script="Hant" typeface="新細明體"/>
+        <a:font script="Arab" typeface="Arial"/>
+        <a:font script="Hebr" typeface="Arial"/>
+        <a:font script="Thai" typeface="Cordia New"/>
+        <a:font script="Ethi" typeface="Nyala"/>
+        <a:font script="Beng" typeface="Vrinda"/>
+        <a:font script="Gujr" typeface="Shruti"/>
+        <a:font script="Khmr" typeface="DaunPenh"/>
+        <a:font script="Knda" typeface="Tunga"/>
+        <a:font script="Guru" typeface="Raavi"/>
+        <a:font script="Cans" typeface="Euphemia"/>
+        <a:font script="Cher" typeface="Plantagenet Cherokee"/>
+        <a:font script="Yiii" typeface="Microsoft Yi Baiti"/>
+        <a:font script="Tibt" typeface="Microsoft Himalaya"/>
+        <a:font script="Thaa" typeface="MV Boli"/>
+        <a:font script="Deva" typeface="Mangal"/>
+        <a:font script="Telu" typeface="Gautami"/>
+        <a:font script="Taml" typeface="Latha"/>
+        <a:font script="Syrc" typeface="Estrangelo Edessa"/>
+        <a:font script="Orya" typeface="Kalinga"/>
+        <a:font script="Mlym" typeface="Kartika"/>
+        <a:font script="Laoo" typeface="DokChampa"/>
+        <a:font script="Sinh" typeface="Iskoola Pota"/>
+        <a:font script="Mong" typeface="Mongolian Baiti"/>
+        <a:font script="Viet" typeface="Arial"/>
+        <a:font script="Uigh" typeface="Microsoft Uighur"/>
+        <a:font script="Geor" typeface="Sylfaen"/>
+        <a:font script="Armn" typeface="Arial"/>
+        <a:font script="Bugi" typeface="Leelawadee UI"/>
+        <a:font script="Bopo" typeface="Microsoft JhengHei"/>
+        <a:font script="Java" typeface="Javanese Text"/>
+        <a:font script="Lisu" typeface="Segoe UI"/>
+        <a:font script="Mymr" typeface="Myanmar Text"/>
+        <a:font script="Nkoo" typeface="Ebrima"/>
+        <a:font script="Olck" typeface="Nirmala UI"/>
+        <a:font script="Osma" typeface="Ebrima"/>
+        <a:font script="Phag" typeface="Phagspa"/>
+        <a:font script="Syrn" typeface="Estrangelo Edessa"/>
+        <a:font script="Syrj" typeface="Estrangelo Edessa"/>
+        <a:font script="Syre" typeface="Estrangelo Edessa"/>
+        <a:font script="Sora" typeface="Nirmala UI"/>
+        <a:font script="Tale" typeface="Microsoft Tai Le"/>
+        <a:font script="Talu" typeface="Microsoft New Tai Lue"/>
+        <a:font script="Tfng" typeface="Ebrima"/>
+      </a:minorFont>
+    </a:fontScheme>
+    <a:fmtScheme name="Office">
+      <a:fillStyleLst>
+        <a:solidFill>
+          <a:schemeClr val="phClr"/>
+        </a:solidFill>
+        <a:gradFill rotWithShape="1">
+          <a:gsLst>
+            <a:gs pos="0">
+              <a:schemeClr val="phClr">
+                <a:lumMod val="110000"/>
+                <a:satMod val="105000"/>
+                <a:tint val="67000"/>
+              </a:schemeClr>
+            </a:gs>
+            <a:gs pos="50000">
+              <a:schemeClr val="phClr">
+                <a:lumMod val="105000"/>
+                <a:satMod val="103000"/>
+                <a:tint val="73000"/>
+              </a:schemeClr>
+            </a:gs>
+            <a:gs pos="100000">
+              <a:schemeClr val="phClr">
+                <a:lumMod val="105000"/>
+                <a:satMod val="109000"/>
+                <a:tint val="81000"/>
+              </a:schemeClr>
+            </a:gs>
+          </a:gsLst>
+          <a:lin ang="5400000" scaled="0"/>
+        </a:gradFill>
+        <a:gradFill rotWithShape="1">
+          <a:gsLst>
+            <a:gs pos="0">
+              <a:schemeClr val="phClr">
+                <a:satMod val="103000"/>
+                <a:lumMod val="102000"/>
+                <a:tint val="94000"/>
+              </a:schemeClr>
+            </a:gs>
+            <a:gs pos="50000">
+              <a:schemeClr val="phClr">
+                <a:satMod val="110000"/>
+                <a:lumMod val="100000"/>
+                <a:shade val="100000"/>
+              </a:schemeClr>
+            </a:gs>
+            <a:gs pos="100000">
+              <a:schemeClr val="phClr">
+                <a:lumMod val="99000"/>
+                <a:satMod val="120000"/>
+                <a:shade val="78000"/>
+              </a:schemeClr>
+            </a:gs>
+          </a:gsLst>
+          <a:lin ang="5400000" scaled="0"/>
+        </a:gradFill>
+      </a:fillStyleLst>
+      <a:lnStyleLst>
+        <a:ln w="12700" cap="flat" cmpd="sng" algn="ctr">
+          <a:solidFill>
+            <a:schemeClr val="phClr"/>
+          </a:solidFill>
+          <a:prstDash val="solid"/>
+          <a:miter lim="800000"/>
+        </a:ln>
+        <a:ln w="19050" cap="flat" cmpd="sng" algn="ctr">
+          <a:solidFill>
+            <a:schemeClr val="phClr"/>
+          </a:solidFill>
+          <a:prstDash val="solid"/>
+          <a:miter lim="800000"/>
+        </a:ln>
+        <a:ln w="25400" cap="flat" cmpd="sng" algn="ctr">
+          <a:solidFill>
+            <a:schemeClr val="phClr"/>
+          </a:solidFill>
+          <a:prstDash val="solid"/>
+          <a:miter lim="800000"/>
+        </a:ln>
+      </a:lnStyleLst>
+      <a:effectStyleLst>
+        <a:effectStyle>
+          <a:effectLst/>
+        </a:effectStyle>
+        <a:effectStyle>
+          <a:effectLst/>
+        </a:effectStyle>
+        <a:effectStyle>
+          <a:effectLst>
+            <a:outerShdw blurRad="57150" dist="19050" dir="5400000" algn="ctr" rotWithShape="0">
+              <a:srgbClr val="000000">
+                <a:alpha val="63000"/>
+              </a:srgbClr>
+            </a:outerShdw>
+          </a:effectLst>
+        </a:effectStyle>
+      </a:effectStyleLst>
+      <a:bgFillStyleLst>
+        <a:solidFill>
+          <a:schemeClr val="phClr"/>
+        </a:solidFill>
+        <a:solidFill>
+          <a:schemeClr val="phClr">
+            <a:tint val="95000"/>
+            <a:satMod val="170000"/>
+          </a:schemeClr>
+        </a:solidFill>
+        <a:gradFill rotWithShape="1">
+          <a:gsLst>
+            <a:gs pos="0">
+              <a:schemeClr val="phClr">
+                <a:tint val="93000"/>
+                <a:satMod val="150000"/>
+                <a:shade val="98000"/>
+                <a:lumMod val="102000"/>
+              </a:schemeClr>
+            </a:gs>
+            <a:gs pos="50000">
+              <a:schemeClr val="phClr">
+                <a:tint val="98000"/>
+                <a:satMod val="130000"/>
+                <a:shade val="90000"/>
+                <a:lumMod val="103000"/>
+              </a:schemeClr>
+            </a:gs>
+            <a:gs pos="100000">
+              <a:schemeClr val="phClr">
+                <a:shade val="63000"/>
+                <a:satMod val="120000"/>
+              </a:schemeClr>
+            </a:gs>
+          </a:gsLst>
+          <a:lin ang="5400000" scaled="0"/>
+        </a:gradFill>
+      </a:bgFillStyleLst>
+    </a:fmtScheme>
+  </a:themeElements>
+  <a:objectDefaults>
+    <a:lnDef>
+      <a:spPr/>
+      <a:bodyPr/>
+      <a:lstStyle/>
+      <a:style>
+        <a:lnRef idx="2">
+          <a:schemeClr val="accent1"/>
+        </a:lnRef>
+        <a:fillRef idx="0">
+          <a:schemeClr val="accent1"/>
+        </a:fillRef>
+        <a:effectRef idx="1">
+          <a:schemeClr val="accent1"/>
+        </a:effectRef>
+        <a:fontRef idx="minor">
+          <a:schemeClr val="tx1"/>
+        </a:fontRef>
+      </a:style>
+    </a:lnDef>
+  </a:objectDefaults>
+  <a:extraClrSchemeLst/>
+  <a:extLst>
+    <a:ext uri="{05A4C25C-085E-4340-85A3-A5531E510DB2}">
+      <thm15:themeFamily xmlns:thm15="http://schemas.microsoft.com/office/thememl/2012/main" name="Office Theme" id="{2E142A2C-CD16-42D6-873A-C26D2A0506FA}" vid="{1BDDFF52-6CD6-40A5-AB3C-68EB2F1E4D0A}"/>
+    </a:ext>
+  </a:extLst>
+</a:theme>
 </file>